--- a/docs/presentation/MediPlan-Sprint2-Presentation.pptx
+++ b/docs/presentation/MediPlan-Sprint2-Presentation.pptx
@@ -4,23 +4,20 @@
   <p:sldMasterIdLst>
     <p:sldMasterId id="2147483648" r:id="rId1"/>
   </p:sldMasterIdLst>
-  <p:notesMasterIdLst>
-    <p:notesMasterId r:id="rId13"/>
-  </p:notesMasterIdLst>
   <p:sldIdLst>
-    <p:sldId id="256" r:id="rId2"/>
-    <p:sldId id="257" r:id="rId3"/>
-    <p:sldId id="258" r:id="rId4"/>
-    <p:sldId id="259" r:id="rId5"/>
-    <p:sldId id="260" r:id="rId6"/>
-    <p:sldId id="261" r:id="rId7"/>
-    <p:sldId id="262" r:id="rId8"/>
-    <p:sldId id="263" r:id="rId9"/>
-    <p:sldId id="264" r:id="rId10"/>
-    <p:sldId id="265" r:id="rId11"/>
-    <p:sldId id="266" r:id="rId12"/>
+    <p:sldId id="256" r:id="rId7"/>
+    <p:sldId id="257" r:id="rId9"/>
+    <p:sldId id="258" r:id="rId10"/>
+    <p:sldId id="259" r:id="rId11"/>
+    <p:sldId id="260" r:id="rId12"/>
+    <p:sldId id="261" r:id="rId13"/>
+    <p:sldId id="262" r:id="rId14"/>
+    <p:sldId id="263" r:id="rId15"/>
+    <p:sldId id="264" r:id="rId16"/>
+    <p:sldId id="265" r:id="rId17"/>
+    <p:sldId id="266" r:id="rId18"/>
   </p:sldIdLst>
-  <p:sldSz cx="12192000" cy="6858000"/>
+  <p:sldSz cx="12191695" cy="6858000" type="screen4x3"/>
   <p:notesSz cx="6858000" cy="9144000"/>
   <p:defaultTextStyle>
     <a:defPPr>
@@ -117,27 +114,11 @@
       </a:defRPr>
     </a:lvl9pPr>
   </p:defaultTextStyle>
-  <p:extLst>
-    <p:ext uri="{EFAFB233-063F-42B5-8137-9DF3F51BA10A}">
-      <p15:sldGuideLst xmlns:p15="http://schemas.microsoft.com/office/powerpoint/2012/main">
-        <p15:guide id="1" orient="horz" pos="2160">
-          <p15:clr>
-            <a:srgbClr val="A4A3A4"/>
-          </p15:clr>
-        </p15:guide>
-        <p15:guide id="2" pos="2880">
-          <p15:clr>
-            <a:srgbClr val="A4A3A4"/>
-          </p15:clr>
-        </p15:guide>
-      </p15:sldGuideLst>
-    </p:ext>
-  </p:extLst>
 </p:presentation>
 </file>
 
 <file path=ppt/notesMasters/notesMaster1.xml><?xml version="1.0" encoding="utf-8"?>
-<p:notesMaster xmlns:a="http://schemas.openxmlformats.org/drawingml/2006/main" xmlns:r="http://schemas.openxmlformats.org/officeDocument/2006/relationships" xmlns:p="http://schemas.openxmlformats.org/presentationml/2006/main">
+<p:notesMaster xmlns:a="http://schemas.openxmlformats.org/drawingml/2006/main" xmlns:p="http://schemas.openxmlformats.org/presentationml/2006/main" xmlns:r="http://schemas.openxmlformats.org/officeDocument/2006/relationships">
   <p:cSld>
     <p:bg>
       <p:bgRef idx="1001">
@@ -158,16 +139,241 @@
           <a:chExt cx="0" cy="0"/>
         </a:xfrm>
       </p:grpSpPr>
+      <p:sp>
+        <p:nvSpPr>
+          <p:cNvPr id="2" name="Header Placeholder 1"/>
+          <p:cNvSpPr>
+            <a:spLocks noGrp="1"/>
+          </p:cNvSpPr>
+          <p:nvPr>
+            <p:ph type="hdr" sz="quarter"/>
+          </p:nvPr>
+        </p:nvSpPr>
+        <p:spPr>
+          <a:xfrm>
+            <a:off x="0" y="0"/>
+            <a:ext cx="2971800" cy="457200"/>
+          </a:xfrm>
+          <a:prstGeom prst="rect">
+            <a:avLst/>
+          </a:prstGeom>
+        </p:spPr>
+        <p:txBody>
+          <a:bodyPr vert="horz" lIns="91440" tIns="45720" rIns="91440" bIns="45720" rtlCol="0"/>
+          <a:lstStyle>
+            <a:lvl1pPr algn="l">
+              <a:defRPr sz="1200"/>
+            </a:lvl1pPr>
+          </a:lstStyle>
+          <a:p>
+            <a:endParaRPr lang="en-US"/>
+          </a:p>
+        </p:txBody>
+      </p:sp>
+      <p:sp>
+        <p:nvSpPr>
+          <p:cNvPr id="3" name="Date Placeholder 2"/>
+          <p:cNvSpPr>
+            <a:spLocks noGrp="1"/>
+          </p:cNvSpPr>
+          <p:nvPr>
+            <p:ph type="dt" idx="1"/>
+          </p:nvPr>
+        </p:nvSpPr>
+        <p:spPr>
+          <a:xfrm>
+            <a:off x="3884613" y="0"/>
+            <a:ext cx="2971800" cy="457200"/>
+          </a:xfrm>
+          <a:prstGeom prst="rect">
+            <a:avLst/>
+          </a:prstGeom>
+        </p:spPr>
+        <p:txBody>
+          <a:bodyPr vert="horz" lIns="91440" tIns="45720" rIns="91440" bIns="45720" rtlCol="0"/>
+          <a:lstStyle>
+            <a:lvl1pPr algn="r">
+              <a:defRPr sz="1200"/>
+            </a:lvl1pPr>
+          </a:lstStyle>
+          <a:p>
+            <a:fld id="{0F89C1C7-3DCD-1040-A9CF-14679D8B5DDD}" type="datetimeFigureOut">
+              <a:rPr lang="en-US" smtClean="0"/>
+              <a:t>10/17/16</a:t>
+            </a:fld>
+            <a:endParaRPr lang="en-US"/>
+          </a:p>
+        </p:txBody>
+      </p:sp>
+      <p:sp>
+        <p:nvSpPr>
+          <p:cNvPr id="4" name="Slide Image Placeholder 3"/>
+          <p:cNvSpPr>
+            <a:spLocks noGrp="1" noRot="1" noChangeAspect="1"/>
+          </p:cNvSpPr>
+          <p:nvPr>
+            <p:ph type="sldImg" idx="2"/>
+          </p:nvPr>
+        </p:nvSpPr>
+        <p:spPr>
+          <a:xfrm>
+            <a:off x="1143000" y="685800"/>
+            <a:ext cx="4572000" cy="3429000"/>
+          </a:xfrm>
+          <a:prstGeom prst="rect">
+            <a:avLst/>
+          </a:prstGeom>
+          <a:noFill/>
+          <a:ln w="12700">
+            <a:solidFill>
+              <a:prstClr val="black"/>
+            </a:solidFill>
+          </a:ln>
+        </p:spPr>
+        <p:txBody>
+          <a:bodyPr vert="horz" lIns="91440" tIns="45720" rIns="91440" bIns="45720" rtlCol="0" anchor="ctr"/>
+          <a:lstStyle/>
+          <a:p>
+            <a:endParaRPr lang="en-US"/>
+          </a:p>
+        </p:txBody>
+      </p:sp>
+      <p:sp>
+        <p:nvSpPr>
+          <p:cNvPr id="5" name="Notes Placeholder 4"/>
+          <p:cNvSpPr>
+            <a:spLocks noGrp="1"/>
+          </p:cNvSpPr>
+          <p:nvPr>
+            <p:ph type="body" sz="quarter" idx="3"/>
+          </p:nvPr>
+        </p:nvSpPr>
+        <p:spPr>
+          <a:xfrm>
+            <a:off x="685800" y="4343400"/>
+            <a:ext cx="5486400" cy="4114800"/>
+          </a:xfrm>
+          <a:prstGeom prst="rect">
+            <a:avLst/>
+          </a:prstGeom>
+        </p:spPr>
+        <p:txBody>
+          <a:bodyPr vert="horz" lIns="91440" tIns="45720" rIns="91440" bIns="45720" rtlCol="0"/>
+          <a:lstStyle/>
+          <a:p>
+            <a:pPr lvl="0"/>
+            <a:r>
+              <a:rPr lang="en-US" smtClean="0"/>
+              <a:t>Click to edit Master text styles</a:t>
+            </a:r>
+          </a:p>
+          <a:p>
+            <a:pPr lvl="1"/>
+            <a:r>
+              <a:rPr lang="en-US" smtClean="0"/>
+              <a:t>Second level</a:t>
+            </a:r>
+          </a:p>
+          <a:p>
+            <a:pPr lvl="2"/>
+            <a:r>
+              <a:rPr lang="en-US" smtClean="0"/>
+              <a:t>Third level</a:t>
+            </a:r>
+          </a:p>
+          <a:p>
+            <a:pPr lvl="3"/>
+            <a:r>
+              <a:rPr lang="en-US" smtClean="0"/>
+              <a:t>Fourth level</a:t>
+            </a:r>
+          </a:p>
+          <a:p>
+            <a:pPr lvl="4"/>
+            <a:r>
+              <a:rPr lang="en-US" smtClean="0"/>
+              <a:t>Fifth level</a:t>
+            </a:r>
+            <a:endParaRPr lang="en-US"/>
+          </a:p>
+        </p:txBody>
+      </p:sp>
+      <p:sp>
+        <p:nvSpPr>
+          <p:cNvPr id="6" name="Footer Placeholder 5"/>
+          <p:cNvSpPr>
+            <a:spLocks noGrp="1"/>
+          </p:cNvSpPr>
+          <p:nvPr>
+            <p:ph type="ftr" sz="quarter" idx="4"/>
+          </p:nvPr>
+        </p:nvSpPr>
+        <p:spPr>
+          <a:xfrm>
+            <a:off x="0" y="8685213"/>
+            <a:ext cx="2971800" cy="457200"/>
+          </a:xfrm>
+          <a:prstGeom prst="rect">
+            <a:avLst/>
+          </a:prstGeom>
+        </p:spPr>
+        <p:txBody>
+          <a:bodyPr vert="horz" lIns="91440" tIns="45720" rIns="91440" bIns="45720" rtlCol="0" anchor="b"/>
+          <a:lstStyle>
+            <a:lvl1pPr algn="l">
+              <a:defRPr sz="1200"/>
+            </a:lvl1pPr>
+          </a:lstStyle>
+          <a:p>
+            <a:endParaRPr lang="en-US"/>
+          </a:p>
+        </p:txBody>
+      </p:sp>
+      <p:sp>
+        <p:nvSpPr>
+          <p:cNvPr id="7" name="Slide Number Placeholder 6"/>
+          <p:cNvSpPr>
+            <a:spLocks noGrp="1"/>
+          </p:cNvSpPr>
+          <p:nvPr>
+            <p:ph type="sldNum" sz="quarter" idx="5"/>
+          </p:nvPr>
+        </p:nvSpPr>
+        <p:spPr>
+          <a:xfrm>
+            <a:off x="3884613" y="8685213"/>
+            <a:ext cx="2971800" cy="457200"/>
+          </a:xfrm>
+          <a:prstGeom prst="rect">
+            <a:avLst/>
+          </a:prstGeom>
+        </p:spPr>
+        <p:txBody>
+          <a:bodyPr vert="horz" lIns="91440" tIns="45720" rIns="91440" bIns="45720" rtlCol="0" anchor="b"/>
+          <a:lstStyle>
+            <a:lvl1pPr algn="r">
+              <a:defRPr sz="1200"/>
+            </a:lvl1pPr>
+          </a:lstStyle>
+          <a:p>
+            <a:fld id="{BB5E49A5-4136-284D-997B-48E1D791AD67}" type="slidenum">
+              <a:rPr lang="en-US" smtClean="0"/>
+              <a:t>‹#›</a:t>
+            </a:fld>
+            <a:endParaRPr lang="en-US"/>
+          </a:p>
+        </p:txBody>
+      </p:sp>
     </p:spTree>
     <p:extLst>
       <p:ext uri="{BB962C8B-B14F-4D97-AF65-F5344CB8AC3E}">
-        <p14:creationId xmlns:p14="http://schemas.microsoft.com/office/powerpoint/2010/main" val="2832637338"/>
+        <p14:creationId xmlns:p14="http://schemas.microsoft.com/office/powerpoint/2010/main" val="2623252185"/>
       </p:ext>
     </p:extLst>
   </p:cSld>
   <p:clrMap bg1="lt1" tx1="dk1" bg2="lt2" tx2="dk2" accent1="accent1" accent2="accent2" accent3="accent3" accent4="accent4" accent5="accent5" accent6="accent6" hlink="hlink" folHlink="folHlink"/>
   <p:notesStyle>
-    <a:lvl1pPr marL="0" algn="l" defTabSz="914400" rtl="0" eaLnBrk="1" latinLnBrk="0" hangingPunct="1">
+    <a:lvl1pPr marL="0" algn="l" defTabSz="457200" rtl="0" eaLnBrk="1" latinLnBrk="0" hangingPunct="1">
       <a:defRPr sz="1200" kern="1200">
         <a:solidFill>
           <a:schemeClr val="tx1"/>
@@ -177,7 +383,7 @@
         <a:cs typeface="+mn-cs"/>
       </a:defRPr>
     </a:lvl1pPr>
-    <a:lvl2pPr marL="457200" algn="l" defTabSz="914400" rtl="0" eaLnBrk="1" latinLnBrk="0" hangingPunct="1">
+    <a:lvl2pPr marL="457200" algn="l" defTabSz="457200" rtl="0" eaLnBrk="1" latinLnBrk="0" hangingPunct="1">
       <a:defRPr sz="1200" kern="1200">
         <a:solidFill>
           <a:schemeClr val="tx1"/>
@@ -187,7 +393,7 @@
         <a:cs typeface="+mn-cs"/>
       </a:defRPr>
     </a:lvl2pPr>
-    <a:lvl3pPr marL="914400" algn="l" defTabSz="914400" rtl="0" eaLnBrk="1" latinLnBrk="0" hangingPunct="1">
+    <a:lvl3pPr marL="914400" algn="l" defTabSz="457200" rtl="0" eaLnBrk="1" latinLnBrk="0" hangingPunct="1">
       <a:defRPr sz="1200" kern="1200">
         <a:solidFill>
           <a:schemeClr val="tx1"/>
@@ -197,7 +403,7 @@
         <a:cs typeface="+mn-cs"/>
       </a:defRPr>
     </a:lvl3pPr>
-    <a:lvl4pPr marL="1371600" algn="l" defTabSz="914400" rtl="0" eaLnBrk="1" latinLnBrk="0" hangingPunct="1">
+    <a:lvl4pPr marL="1371600" algn="l" defTabSz="457200" rtl="0" eaLnBrk="1" latinLnBrk="0" hangingPunct="1">
       <a:defRPr sz="1200" kern="1200">
         <a:solidFill>
           <a:schemeClr val="tx1"/>
@@ -207,7 +413,7 @@
         <a:cs typeface="+mn-cs"/>
       </a:defRPr>
     </a:lvl4pPr>
-    <a:lvl5pPr marL="1828800" algn="l" defTabSz="914400" rtl="0" eaLnBrk="1" latinLnBrk="0" hangingPunct="1">
+    <a:lvl5pPr marL="1828800" algn="l" defTabSz="457200" rtl="0" eaLnBrk="1" latinLnBrk="0" hangingPunct="1">
       <a:defRPr sz="1200" kern="1200">
         <a:solidFill>
           <a:schemeClr val="tx1"/>
@@ -217,7 +423,7 @@
         <a:cs typeface="+mn-cs"/>
       </a:defRPr>
     </a:lvl5pPr>
-    <a:lvl6pPr marL="2286000" algn="l" defTabSz="914400" rtl="0" eaLnBrk="1" latinLnBrk="0" hangingPunct="1">
+    <a:lvl6pPr marL="2286000" algn="l" defTabSz="457200" rtl="0" eaLnBrk="1" latinLnBrk="0" hangingPunct="1">
       <a:defRPr sz="1200" kern="1200">
         <a:solidFill>
           <a:schemeClr val="tx1"/>
@@ -227,7 +433,7 @@
         <a:cs typeface="+mn-cs"/>
       </a:defRPr>
     </a:lvl6pPr>
-    <a:lvl7pPr marL="2743200" algn="l" defTabSz="914400" rtl="0" eaLnBrk="1" latinLnBrk="0" hangingPunct="1">
+    <a:lvl7pPr marL="2743200" algn="l" defTabSz="457200" rtl="0" eaLnBrk="1" latinLnBrk="0" hangingPunct="1">
       <a:defRPr sz="1200" kern="1200">
         <a:solidFill>
           <a:schemeClr val="tx1"/>
@@ -237,7 +443,7 @@
         <a:cs typeface="+mn-cs"/>
       </a:defRPr>
     </a:lvl7pPr>
-    <a:lvl8pPr marL="3200400" algn="l" defTabSz="914400" rtl="0" eaLnBrk="1" latinLnBrk="0" hangingPunct="1">
+    <a:lvl8pPr marL="3200400" algn="l" defTabSz="457200" rtl="0" eaLnBrk="1" latinLnBrk="0" hangingPunct="1">
       <a:defRPr sz="1200" kern="1200">
         <a:solidFill>
           <a:schemeClr val="tx1"/>
@@ -247,7 +453,7 @@
         <a:cs typeface="+mn-cs"/>
       </a:defRPr>
     </a:lvl8pPr>
-    <a:lvl9pPr marL="3657600" algn="l" defTabSz="914400" rtl="0" eaLnBrk="1" latinLnBrk="0" hangingPunct="1">
+    <a:lvl9pPr marL="3657600" algn="l" defTabSz="457200" rtl="0" eaLnBrk="1" latinLnBrk="0" hangingPunct="1">
       <a:defRPr sz="1200" kern="1200">
         <a:solidFill>
           <a:schemeClr val="tx1"/>
@@ -262,7 +468,7 @@
 </file>
 
 <file path=ppt/notesSlides/notesSlide1.xml><?xml version="1.0" encoding="utf-8"?>
-<p:notes xmlns:a="http://schemas.openxmlformats.org/drawingml/2006/main" xmlns:r="http://schemas.openxmlformats.org/officeDocument/2006/relationships" xmlns:p="http://schemas.openxmlformats.org/presentationml/2006/main">
+<p:notes xmlns:a="http://schemas.openxmlformats.org/drawingml/2006/main" xmlns:p="http://schemas.openxmlformats.org/presentationml/2006/main" xmlns:r="http://schemas.openxmlformats.org/officeDocument/2006/relationships">
   <p:cSld>
     <p:spTree>
       <p:nvGrpSpPr>
@@ -282,7 +488,7 @@
         <p:nvSpPr>
           <p:cNvPr id="2" name="Slide Image Placeholder 1"/>
           <p:cNvSpPr>
-            <a:spLocks noGrp="1" noRot="1" noChangeAspect="1"/>
+            <a:spLocks noGrp="1"/>
           </p:cNvSpPr>
           <p:nvPr>
             <p:ph type="sldImg" idx="2"/>
@@ -297,7 +503,7 @@
             <a:spLocks noGrp="1"/>
           </p:cNvSpPr>
           <p:nvPr>
-            <p:ph type="body" sz="quarter" idx="3"/>
+            <p:ph type="body" idx="3" sz="quarter"/>
           </p:nvPr>
         </p:nvSpPr>
         <p:spPr/>
@@ -306,7 +512,42 @@
           <a:lstStyle/>
           <a:p>
             <a:r>
-              <a:t>Bonjour. Nous venons vous présenter ce que nous avons réalisé au Sprint 2 de MediPlan, notre plateforme de gestion des rendez-vous médicaux. Nous allons rappeler brièvement le projet, l'objectif du sprint, comment la solution est construite, vous démontrer ce qui fonctionne, présenter nos tests, les difficultés rencontrées et ce qui passe au Sprint 3. Chacun de nous présentera sa partie. Environ dix minutes.</a:t>
+              <a:t>SOULEYMANE — 20 s</a:t>
+            </a:r>
+          </a:p>
+          <a:p/>
+          <a:p>
+            <a:r>
+              <a:t>ACCROCHE (à dire telle quelle) :</a:t>
+            </a:r>
+          </a:p>
+          <a:p>
+            <a:r>
+              <a:t>« Dans une clinique, quand deux personnes décrochent le téléphone en même temps, il arrive que le même créneau soit vendu deux fois. C'est un agenda papier, une rature, un patient qui se déplace pour rien. »</a:t>
+            </a:r>
+          </a:p>
+          <a:p/>
+          <a:p>
+            <a:r>
+              <a:t>[ MARQUER UN TEMPS — 1 seconde ]</a:t>
+            </a:r>
+          </a:p>
+          <a:p/>
+          <a:p>
+            <a:r>
+              <a:t>« Le Sprint 2, c'est le sprint où ça devient impossible dans MediPlan. Bonjour, nous sommes l'équipe MediPlan : Souleymane, Zakaria, Larbi. En dix minutes, nous allons vous montrer ce que nous avons développé, testé et intégré. »</a:t>
+            </a:r>
+          </a:p>
+          <a:p/>
+          <a:p>
+            <a:r>
+              <a:t>→ TRANSITION : « D'abord, un rappel rapide du projet. »</a:t>
+            </a:r>
+          </a:p>
+          <a:p/>
+          <a:p>
+            <a:r>
+              <a:t>RAPPEL : on ouvre sur le problème métier, pas sur la technologie.</a:t>
             </a:r>
           </a:p>
         </p:txBody>
@@ -318,7 +559,7 @@
             <a:spLocks noGrp="1"/>
           </p:cNvSpPr>
           <p:nvPr>
-            <p:ph type="sldNum" sz="quarter" idx="5"/>
+            <p:ph type="sldNum" idx="5" sz="quarter"/>
           </p:nvPr>
         </p:nvSpPr>
         <p:spPr/>
@@ -332,7 +573,7 @@
 </file>
 
 <file path=ppt/notesSlides/notesSlide10.xml><?xml version="1.0" encoding="utf-8"?>
-<p:notes xmlns:a="http://schemas.openxmlformats.org/drawingml/2006/main" xmlns:r="http://schemas.openxmlformats.org/officeDocument/2006/relationships" xmlns:p="http://schemas.openxmlformats.org/presentationml/2006/main">
+<p:notes xmlns:a="http://schemas.openxmlformats.org/drawingml/2006/main" xmlns:p="http://schemas.openxmlformats.org/presentationml/2006/main" xmlns:r="http://schemas.openxmlformats.org/officeDocument/2006/relationships">
   <p:cSld>
     <p:spTree>
       <p:nvGrpSpPr>
@@ -352,7 +593,7 @@
         <p:nvSpPr>
           <p:cNvPr id="2" name="Slide Image Placeholder 1"/>
           <p:cNvSpPr>
-            <a:spLocks noGrp="1" noRot="1" noChangeAspect="1"/>
+            <a:spLocks noGrp="1"/>
           </p:cNvSpPr>
           <p:nvPr>
             <p:ph type="sldImg" idx="2"/>
@@ -367,7 +608,7 @@
             <a:spLocks noGrp="1"/>
           </p:cNvSpPr>
           <p:nvPr>
-            <p:ph type="body" sz="quarter" idx="3"/>
+            <p:ph type="body" idx="3" sz="quarter"/>
           </p:nvPr>
         </p:nvSpPr>
         <p:spPr/>
@@ -376,7 +617,31 @@
           <a:lstStyle/>
           <a:p>
             <a:r>
-              <a:t>Pour la suite, le Sprint 3 porte sur le cycle de vie complet du rendez-vous. L'annulation avec motif est déjà livrée, il nous reste à la valider officiellement. Les notifications internes sont en cours. Viennent ensuite les statistiques réelles du tableau de bord, un renforcement de la sécurité des rendez-vous, et le décalage en bloc. Nous reprenons aussi les trois tickets reportés du Sprint 2. En résumé : le Sprint 2 livre une tranche complète, de la connexion au suivi de la journée ; le Sprint 3 ajoute le cycle de vie et durcit la sécurité.</a:t>
+              <a:t>ZAKARIA — 1 min</a:t>
+            </a:r>
+          </a:p>
+          <a:p/>
+          <a:p>
+            <a:r>
+              <a:t>« Le Sprint 3 porte sur le cycle de vie complet du rendez-vous : l'annulation, déjà livrée, à valider officiellement ; les notifications internes, en cours ; les statistiques réelles du tableau de bord ; et un renforcement de la sécurité des rendez-vous. »</a:t>
+            </a:r>
+          </a:p>
+          <a:p/>
+          <a:p>
+            <a:r>
+              <a:t>« En un mot : le Sprint 2 livre une tranche complète, de la connexion au suivi de la journée. Le Sprint 3 ajoute le cycle de vie et durcit la sécurité. »</a:t>
+            </a:r>
+          </a:p>
+          <a:p/>
+          <a:p>
+            <a:r>
+              <a:t>PRÉCISION SI ON DEMANDE : le compteur des rendez-vous du jour est déjà réel ; ce sont les statistiques complètes qui viennent au Sprint 3.</a:t>
+            </a:r>
+          </a:p>
+          <a:p/>
+          <a:p>
+            <a:r>
+              <a:t>NE PAS PROMETTRE le décalage en bloc (24) : le code existe sur une branche, il n'est pas intégré.</a:t>
             </a:r>
           </a:p>
         </p:txBody>
@@ -388,7 +653,7 @@
             <a:spLocks noGrp="1"/>
           </p:cNvSpPr>
           <p:nvPr>
-            <p:ph type="sldNum" sz="quarter" idx="5"/>
+            <p:ph type="sldNum" idx="5" sz="quarter"/>
           </p:nvPr>
         </p:nvSpPr>
         <p:spPr/>
@@ -402,7 +667,7 @@
 </file>
 
 <file path=ppt/notesSlides/notesSlide11.xml><?xml version="1.0" encoding="utf-8"?>
-<p:notes xmlns:a="http://schemas.openxmlformats.org/drawingml/2006/main" xmlns:r="http://schemas.openxmlformats.org/officeDocument/2006/relationships" xmlns:p="http://schemas.openxmlformats.org/presentationml/2006/main">
+<p:notes xmlns:a="http://schemas.openxmlformats.org/drawingml/2006/main" xmlns:p="http://schemas.openxmlformats.org/presentationml/2006/main" xmlns:r="http://schemas.openxmlformats.org/officeDocument/2006/relationships">
   <p:cSld>
     <p:spTree>
       <p:nvGrpSpPr>
@@ -422,7 +687,7 @@
         <p:nvSpPr>
           <p:cNvPr id="2" name="Slide Image Placeholder 1"/>
           <p:cNvSpPr>
-            <a:spLocks noGrp="1" noRot="1" noChangeAspect="1"/>
+            <a:spLocks noGrp="1"/>
           </p:cNvSpPr>
           <p:nvPr>
             <p:ph type="sldImg" idx="2"/>
@@ -437,7 +702,7 @@
             <a:spLocks noGrp="1"/>
           </p:cNvSpPr>
           <p:nvPr>
-            <p:ph type="body" sz="quarter" idx="3"/>
+            <p:ph type="body" idx="3" sz="quarter"/>
           </p:nvPr>
         </p:nvSpPr>
         <p:spPr/>
@@ -446,40 +711,66 @@
           <a:lstStyle/>
           <a:p>
             <a:r>
-              <a:t>En résumé, le Sprint 2 est réalisé et intégré : authentification sécurisée, disponibilités, réservation par la réception sans double-réservation, flux du jour, le tout couvert par 171 tests. Nous sommes disponibles pour vos questions.</a:t>
-            </a:r>
-          </a:p>
-          <a:p>
-            <a:endParaRPr/>
-          </a:p>
-          <a:p>
-            <a:r>
-              <a:t>Questions probables :</a:t>
-            </a:r>
-          </a:p>
-          <a:p>
-            <a:r>
-              <a:t>— « Pourquoi le patient ne réserve pas lui-même ? » → Choix métier : l'utilisateur réel est la réception ; le patient appelle. Le libre-service pourra venir plus tard.</a:t>
-            </a:r>
-          </a:p>
-          <a:p>
-            <a:r>
-              <a:t>— « Comment empêchez-vous les doubles réservations ? » → Un index unique en base et une transaction avec verrou ; testé en concurrence.</a:t>
-            </a:r>
-          </a:p>
-          <a:p>
-            <a:r>
-              <a:t>— « Les données sont-elles protégées ? » → RBAC à 4 rôles, cloisonnement par clinique, mots de passe hachés (bcrypt), verrouillage de compte.</a:t>
-            </a:r>
-          </a:p>
-          <a:p>
-            <a:r>
-              <a:t>— « Qu'est-ce qui n'était pas fini ? » → Trois tickets non bloquants transférés au Sprint 3 (gestion des médecins, doc, secrets).</a:t>
-            </a:r>
-          </a:p>
-          <a:p>
-            <a:r>
-              <a:t>— Chaque membre peut détailler sa contribution : voir la diapositive Jira.</a:t>
+              <a:t>SOULEYMANE — 15 s — REPRENDRE L'ACCROCHE DU DÉBUT. C'est ce qui donne une présentation construite plutôt que trois exposés.</a:t>
+            </a:r>
+          </a:p>
+          <a:p/>
+          <a:p>
+            <a:r>
+              <a:t>« On a commencé par un créneau vendu deux fois. Aujourd'hui, dans MediPlan, c'est la base de données elle-même qui l'empêche. La réception se connecte, ouvre son agenda, réserve, suit sa journée, annule — de bout en bout, avec 171 tests derrière. Merci. Nous répondons à vos questions, chacun sur sa partie. »</a:t>
+            </a:r>
+          </a:p>
+          <a:p/>
+          <a:p>
+            <a:r>
+              <a:t>RÈGLE : répondre court, puis SE TAIRE. Une réponse qui s'étire donne l'impression qu'on cherche.</a:t>
+            </a:r>
+          </a:p>
+          <a:p/>
+          <a:p>
+            <a:r>
+              <a:t>— Pourquoi le patient ne réserve pas lui-même ? (Souleymane) « Choix métier assumé : l'utilisateur réel est la réception, le patient appelle. Le libre-service viendra quand le cœur sera solide. »</a:t>
+            </a:r>
+          </a:p>
+          <a:p>
+            <a:r>
+              <a:t>— Comment évitez-vous les doubles réservations ? (Souleymane) « Un index unique partiel en base, plus une transaction avec verrou. Ce n'est pas notre code qui arbitre, c'est PostgreSQL. Testé en concurrence. »</a:t>
+            </a:r>
+          </a:p>
+          <a:p>
+            <a:r>
+              <a:t>— Les données de santé sont-elles protégées ? (Souleymane) « Quatre rôles, cloisonnement par clinique, mots de passe hachés bcrypt, verrouillage après cinq échecs, et un patient léger qui ne peut pas se connecter par construction. »</a:t>
+            </a:r>
+          </a:p>
+          <a:p>
+            <a:r>
+              <a:t>— Qu'est-ce qui n'est pas fini ? (Souleymane) « Trois tickets non bloquants transférés au Sprint 3 : gestion des médecins, une précision de doc, les secrets d'environnement. »</a:t>
+            </a:r>
+          </a:p>
+          <a:p>
+            <a:r>
+              <a:t>— Comment testez-vous le frontend ? (Larbi) « Composants, services HTTP, guards de rôle et intercepteurs — 123 tests — plus une vérification manuelle bout-en-bout. »</a:t>
+            </a:r>
+          </a:p>
+          <a:p>
+            <a:r>
+              <a:t>— Pourquoi Angular / NestJS ? (Zakaria) « Un seul langage, TypeScript, du navigateur à la base. Une équipe de trois, une seule courbe d'apprentissage. »</a:t>
+            </a:r>
+          </a:p>
+          <a:p>
+            <a:r>
+              <a:t>— Et le décalage en bloc ? (Souleymane) « Le code existe sur une branche, il n'est pas intégré. Donc pour nous il n'est pas terminé — c'est le Sprint 3. »</a:t>
+            </a:r>
+          </a:p>
+          <a:p>
+            <a:r>
+              <a:t>— Qui a fait quoi ? Chacun reprend SA ligne de la diapo Jira.</a:t>
+            </a:r>
+          </a:p>
+          <a:p/>
+          <a:p>
+            <a:r>
+              <a:t>SI ON NE SAIT PAS : « Je ne veux pas vous répondre de mémoire — c'est un point que je vérifie et je vous reviens dessus. » Jamais de bluff.</a:t>
             </a:r>
           </a:p>
         </p:txBody>
@@ -491,7 +782,7 @@
             <a:spLocks noGrp="1"/>
           </p:cNvSpPr>
           <p:nvPr>
-            <p:ph type="sldNum" sz="quarter" idx="5"/>
+            <p:ph type="sldNum" idx="5" sz="quarter"/>
           </p:nvPr>
         </p:nvSpPr>
         <p:spPr/>
@@ -505,7 +796,7 @@
 </file>
 
 <file path=ppt/notesSlides/notesSlide2.xml><?xml version="1.0" encoding="utf-8"?>
-<p:notes xmlns:a="http://schemas.openxmlformats.org/drawingml/2006/main" xmlns:r="http://schemas.openxmlformats.org/officeDocument/2006/relationships" xmlns:p="http://schemas.openxmlformats.org/presentationml/2006/main">
+<p:notes xmlns:a="http://schemas.openxmlformats.org/drawingml/2006/main" xmlns:p="http://schemas.openxmlformats.org/presentationml/2006/main" xmlns:r="http://schemas.openxmlformats.org/officeDocument/2006/relationships">
   <p:cSld>
     <p:spTree>
       <p:nvGrpSpPr>
@@ -525,7 +816,7 @@
         <p:nvSpPr>
           <p:cNvPr id="2" name="Slide Image Placeholder 1"/>
           <p:cNvSpPr>
-            <a:spLocks noGrp="1" noRot="1" noChangeAspect="1"/>
+            <a:spLocks noGrp="1"/>
           </p:cNvSpPr>
           <p:nvPr>
             <p:ph type="sldImg" idx="2"/>
@@ -540,7 +831,7 @@
             <a:spLocks noGrp="1"/>
           </p:cNvSpPr>
           <p:nvPr>
-            <p:ph type="body" sz="quarter" idx="3"/>
+            <p:ph type="body" idx="3" sz="quarter"/>
           </p:nvPr>
         </p:nvSpPr>
         <p:spPr/>
@@ -549,7 +840,37 @@
           <a:lstStyle/>
           <a:p>
             <a:r>
-              <a:t>D'abord un rappel. Le problème : dans une clinique, la prise de rendez-vous se fait au téléphone, à la main — agendas papier, doubles réservations, oublis — et la réception n'a pas de vue claire de sa journée. Notre solution est une application web où la réception gère les rendez-vous à la place des patients, qui appellent. On saisit les disponibilités d'un médecin, le système génère les créneaux réservables, et la réception réserve. L'utilisateur principal est donc la réception ; le médecin consulte sa journée ; le patient est « léger », créé au comptoir sans compte. Le tout en Angular, NestJS, PostgreSQL et Docker.</a:t>
+              <a:t>SOULEYMANE — 1 min 30</a:t>
+            </a:r>
+          </a:p>
+          <a:p/>
+          <a:p>
+            <a:r>
+              <a:t>« Le problème : la prise de rendez-vous se fait au téléphone, à la main. Agendas papier, doubles réservations, oublis. Et la réception n'a aucune vue claire de sa journée. »</a:t>
+            </a:r>
+          </a:p>
+          <a:p/>
+          <a:p>
+            <a:r>
+              <a:t>« Notre solution, c'est une application web où la réception gère les rendez-vous à la place des patients. Et c'est notre choix le plus structurant : notre utilisateur principal n'est pas le patient — c'est la réception. Le patient appelle, il ne s'inscrit pas en ligne. »</a:t>
+            </a:r>
+          </a:p>
+          <a:p/>
+          <a:p>
+            <a:r>
+              <a:t>« Quatre profils : la réception, qui fait tout ; le médecin, qui consulte sa journée ; le patient dit léger, créé au comptoir sans compte ni mot de passe ; et un super-administrateur. Le tout en Angular, NestJS, PostgreSQL, dans Docker. »</a:t>
+            </a:r>
+          </a:p>
+          <a:p/>
+          <a:p>
+            <a:r>
+              <a:t>ATTENTION : ne pas détailler la stack — Zakaria y revient à la diapo 4.</a:t>
+            </a:r>
+          </a:p>
+          <a:p/>
+          <a:p>
+            <a:r>
+              <a:t>→ TRANSITION : « Voilà le projet. Maintenant, qu'est-ce qu'on s'était engagé à livrer sur ce sprint ? »</a:t>
             </a:r>
           </a:p>
         </p:txBody>
@@ -561,7 +882,7 @@
             <a:spLocks noGrp="1"/>
           </p:cNvSpPr>
           <p:nvPr>
-            <p:ph type="sldNum" sz="quarter" idx="5"/>
+            <p:ph type="sldNum" idx="5" sz="quarter"/>
           </p:nvPr>
         </p:nvSpPr>
         <p:spPr/>
@@ -575,7 +896,7 @@
 </file>
 
 <file path=ppt/notesSlides/notesSlide3.xml><?xml version="1.0" encoding="utf-8"?>
-<p:notes xmlns:a="http://schemas.openxmlformats.org/drawingml/2006/main" xmlns:r="http://schemas.openxmlformats.org/officeDocument/2006/relationships" xmlns:p="http://schemas.openxmlformats.org/presentationml/2006/main">
+<p:notes xmlns:a="http://schemas.openxmlformats.org/drawingml/2006/main" xmlns:p="http://schemas.openxmlformats.org/presentationml/2006/main" xmlns:r="http://schemas.openxmlformats.org/officeDocument/2006/relationships">
   <p:cSld>
     <p:spTree>
       <p:nvGrpSpPr>
@@ -595,7 +916,7 @@
         <p:nvSpPr>
           <p:cNvPr id="2" name="Slide Image Placeholder 1"/>
           <p:cNvSpPr>
-            <a:spLocks noGrp="1" noRot="1" noChangeAspect="1"/>
+            <a:spLocks noGrp="1"/>
           </p:cNvSpPr>
           <p:nvPr>
             <p:ph type="sldImg" idx="2"/>
@@ -610,7 +931,7 @@
             <a:spLocks noGrp="1"/>
           </p:cNvSpPr>
           <p:nvPr>
-            <p:ph type="body" sz="quarter" idx="3"/>
+            <p:ph type="body" idx="3" sz="quarter"/>
           </p:nvPr>
         </p:nvSpPr>
         <p:spPr/>
@@ -619,7 +940,37 @@
           <a:lstStyle/>
           <a:p>
             <a:r>
-              <a:t>L'objectif du Sprint 2 : qu'une réception puisse se connecter de façon sécurisée, définir les disponibilités des médecins et réserver un rendez-vous pour un patient, sans jamais créer de double réservation. Les fonctionnalités visées : l'authentification complète avec le contrôle d'accès par rôle, le patient léger, les disponibilités, la génération des créneaux, la réservation par la réception, le flux du jour, et une interface soignée. Nous avons choisi ce périmètre parce que c'est la tranche la plus utile : de la connexion jusqu'à un vrai rendez-vous dans l'agenda, en couvrant le cœur métier et la sécurité.</a:t>
+              <a:t>SOULEYMANE — 1 min — C'EST ICI QU'ON POSE LA PHRASE DU JOUR. DIRE LENTEMENT.</a:t>
+            </a:r>
+          </a:p>
+          <a:p/>
+          <a:p>
+            <a:r>
+              <a:t>« Notre objectif tenait en une phrase : une réception se connecte de façon sécurisée, définit les disponibilités des médecins, et réserve un rendez-vous pour un patient — sans jamais créer de double réservation. »</a:t>
+            </a:r>
+          </a:p>
+          <a:p/>
+          <a:p>
+            <a:r>
+              <a:t>[ TEMPS ]</a:t>
+            </a:r>
+          </a:p>
+          <a:p/>
+          <a:p>
+            <a:r>
+              <a:t>« Au Sprint 1, on savait ouvrir une session. Au Sprint 2, la réception fait tourner une vraie journée de clinique : elle ouvre l'agenda, elle réserve, elle suit le flux, elle annule. De bout en bout. »</a:t>
+            </a:r>
+          </a:p>
+          <a:p/>
+          <a:p>
+            <a:r>
+              <a:t>« Pourquoi ce périmètre-là ? Parce que c'est la tranche verticale la plus utile : de la connexion jusqu'à un vrai rendez-vous dans l'agenda. Nous avons volontairement écarté le libre-service patient. Un sprint qui livre un parcours complet vaut mieux que trois demi-fonctionnalités. »</a:t>
+            </a:r>
+          </a:p>
+          <a:p/>
+          <a:p>
+            <a:r>
+              <a:t>→ TRANSITION : « Zakaria va vous expliquer comment tout ça est construit. » — ET SE TOURNER VERS LUI.</a:t>
             </a:r>
           </a:p>
         </p:txBody>
@@ -631,7 +982,7 @@
             <a:spLocks noGrp="1"/>
           </p:cNvSpPr>
           <p:nvPr>
-            <p:ph type="sldNum" sz="quarter" idx="5"/>
+            <p:ph type="sldNum" idx="5" sz="quarter"/>
           </p:nvPr>
         </p:nvSpPr>
         <p:spPr/>
@@ -645,7 +996,7 @@
 </file>
 
 <file path=ppt/notesSlides/notesSlide4.xml><?xml version="1.0" encoding="utf-8"?>
-<p:notes xmlns:a="http://schemas.openxmlformats.org/drawingml/2006/main" xmlns:r="http://schemas.openxmlformats.org/officeDocument/2006/relationships" xmlns:p="http://schemas.openxmlformats.org/presentationml/2006/main">
+<p:notes xmlns:a="http://schemas.openxmlformats.org/drawingml/2006/main" xmlns:p="http://schemas.openxmlformats.org/presentationml/2006/main" xmlns:r="http://schemas.openxmlformats.org/officeDocument/2006/relationships">
   <p:cSld>
     <p:spTree>
       <p:nvGrpSpPr>
@@ -665,7 +1016,7 @@
         <p:nvSpPr>
           <p:cNvPr id="2" name="Slide Image Placeholder 1"/>
           <p:cNvSpPr>
-            <a:spLocks noGrp="1" noRot="1" noChangeAspect="1"/>
+            <a:spLocks noGrp="1"/>
           </p:cNvSpPr>
           <p:nvPr>
             <p:ph type="sldImg" idx="2"/>
@@ -680,7 +1031,7 @@
             <a:spLocks noGrp="1"/>
           </p:cNvSpPr>
           <p:nvPr>
-            <p:ph type="body" sz="quarter" idx="3"/>
+            <p:ph type="body" idx="3" sz="quarter"/>
           </p:nvPr>
         </p:nvSpPr>
         <p:spPr/>
@@ -689,7 +1040,31 @@
           <a:lstStyle/>
           <a:p>
             <a:r>
-              <a:t>Voici comment la solution est construite. Trois parties dans un seul dépôt (monorepo) : un frontend Angular, un backend NestJS, et une base PostgreSQL. Elles communiquent ainsi : le navigateur envoie une requête au backend avec un jeton d'authentification ; NestJS vérifie le jeton, le rôle de l'utilisateur et les données reçues, puis applique la règle métier ; TypeORM écrit en base dans une transaction, et c'est un index unique en base qui garantit qu'un créneau n'est réservé qu'une seule fois ; enfin la réponse revient au frontend qui rafraîchit l'écran. Docker permet de tout lancer d'une commande.</a:t>
+              <a:t>ZAKARIA — 1 min 30</a:t>
+            </a:r>
+          </a:p>
+          <a:p/>
+          <a:p>
+            <a:r>
+              <a:t>« Trois parties dans un seul dépôt : un frontend Angular, un backend NestJS, une base PostgreSQL. »</a:t>
+            </a:r>
+          </a:p>
+          <a:p/>
+          <a:p>
+            <a:r>
+              <a:t>« Suivons une réservation, de bout en bout. Un : le navigateur envoie la requête au backend, avec le jeton d'authentification dans l'en-tête. Deux : NestJS vérifie le jeton, vérifie le rôle de l'utilisateur, valide les données reçues, puis applique la règle métier. Trois : on écrit en base dans une transaction — et c'est là que se joue le cœur du sprint : un index unique garantit qu'un créneau ne peut être pris qu'une seule fois. Quatre : la réponse remonte, et l'écran se met à jour tout seul. »</a:t>
+            </a:r>
+          </a:p>
+          <a:p/>
+          <a:p>
+            <a:r>
+              <a:t>LE GESTE : suivre les trois blocs avec la main, de gauche à droite. On doit VOIR le flux.</a:t>
+            </a:r>
+          </a:p>
+          <a:p/>
+          <a:p>
+            <a:r>
+              <a:t>→ TRANSITION : « Regardons maintenant chaque couche de plus près. »</a:t>
             </a:r>
           </a:p>
         </p:txBody>
@@ -701,7 +1076,7 @@
             <a:spLocks noGrp="1"/>
           </p:cNvSpPr>
           <p:nvPr>
-            <p:ph type="sldNum" sz="quarter" idx="5"/>
+            <p:ph type="sldNum" idx="5" sz="quarter"/>
           </p:nvPr>
         </p:nvSpPr>
         <p:spPr/>
@@ -715,7 +1090,7 @@
 </file>
 
 <file path=ppt/notesSlides/notesSlide5.xml><?xml version="1.0" encoding="utf-8"?>
-<p:notes xmlns:a="http://schemas.openxmlformats.org/drawingml/2006/main" xmlns:r="http://schemas.openxmlformats.org/officeDocument/2006/relationships" xmlns:p="http://schemas.openxmlformats.org/presentationml/2006/main">
+<p:notes xmlns:a="http://schemas.openxmlformats.org/drawingml/2006/main" xmlns:p="http://schemas.openxmlformats.org/presentationml/2006/main" xmlns:r="http://schemas.openxmlformats.org/officeDocument/2006/relationships">
   <p:cSld>
     <p:spTree>
       <p:nvGrpSpPr>
@@ -735,7 +1110,7 @@
         <p:nvSpPr>
           <p:cNvPr id="2" name="Slide Image Placeholder 1"/>
           <p:cNvSpPr>
-            <a:spLocks noGrp="1" noRot="1" noChangeAspect="1"/>
+            <a:spLocks noGrp="1"/>
           </p:cNvSpPr>
           <p:nvPr>
             <p:ph type="sldImg" idx="2"/>
@@ -750,7 +1125,7 @@
             <a:spLocks noGrp="1"/>
           </p:cNvSpPr>
           <p:nvPr>
-            <p:ph type="body" sz="quarter" idx="3"/>
+            <p:ph type="body" idx="3" sz="quarter"/>
           </p:nvPr>
         </p:nvSpPr>
         <p:spPr/>
@@ -759,7 +1134,31 @@
           <a:lstStyle/>
           <a:p>
             <a:r>
-              <a:t>En détail, couche par couche. La base : PostgreSQL, un schéma issu de notre modèle de conception, avec des migrations versionnées. La pièce maîtresse est un index unique partiel sur le créneau : c'est la base de données elle-même qui empêche deux réservations sur le même créneau. Le patient léger est un utilisateur sans mot de passe, donc non connectable. Le backend, en NestJS, expose une API REST organisée en modules ; il gère l'authentification JWT, le contrôle d'accès par rôle via des guards, valide toutes les entrées, et utilise des transactions pour la réservation. Le frontend, en Angular, utilise des composants autonomes et un état réactif ; toute l'interface passe par un design system unique, avec un mode sombre complet, et masque les écrans selon le rôle de l'utilisateur.</a:t>
+              <a:t>ZAKARIA — 1 min 30 — NE PAS LIRE LES PUCES. TROIS PHRASES PAR CARTE.</a:t>
+            </a:r>
+          </a:p>
+          <a:p/>
+          <a:p>
+            <a:r>
+              <a:t>BASE : « Un schéma issu directement de notre modèle de conception, avec des migrations versionnées — donc reproductible sur une machine neuve. La pièce maîtresse, c'est un index unique partiel sur le créneau : les rendez-vous annulés en sont exclus, donc un créneau annulé redevient réservable. Et le patient léger est un utilisateur sans mot de passe : il ne peut pas se connecter, par construction. »</a:t>
+            </a:r>
+          </a:p>
+          <a:p/>
+          <a:p>
+            <a:r>
+              <a:t>BACKEND : « Une API REST en modules — authentification, utilisateurs, disponibilités, rendez-vous. Jeton JWT, mots de passe hachés avec bcrypt, verrouillage du compte après cinq échecs, et un contrôle d'accès par rôle sur chaque route. Toutes les entrées sont validées avant d'atteindre la logique métier. »</a:t>
+            </a:r>
+          </a:p>
+          <a:p/>
+          <a:p>
+            <a:r>
+              <a:t>FRONTEND : « Des composants autonomes, un état réactif, et surtout un design system unique — une seule source de couleurs et de typographie. C'est ce qui fait qu'on a un mode sombre complet sans avoir retouché un seul écran à la main. »</a:t>
+            </a:r>
+          </a:p>
+          <a:p/>
+          <a:p>
+            <a:r>
+              <a:t>→ TRANSITION : « Assez de théorie — Larbi va vous le montrer en vrai. »</a:t>
             </a:r>
           </a:p>
         </p:txBody>
@@ -771,7 +1170,7 @@
             <a:spLocks noGrp="1"/>
           </p:cNvSpPr>
           <p:nvPr>
-            <p:ph type="sldNum" sz="quarter" idx="5"/>
+            <p:ph type="sldNum" idx="5" sz="quarter"/>
           </p:nvPr>
         </p:nvSpPr>
         <p:spPr/>
@@ -785,7 +1184,7 @@
 </file>
 
 <file path=ppt/notesSlides/notesSlide6.xml><?xml version="1.0" encoding="utf-8"?>
-<p:notes xmlns:a="http://schemas.openxmlformats.org/drawingml/2006/main" xmlns:r="http://schemas.openxmlformats.org/officeDocument/2006/relationships" xmlns:p="http://schemas.openxmlformats.org/presentationml/2006/main">
+<p:notes xmlns:a="http://schemas.openxmlformats.org/drawingml/2006/main" xmlns:p="http://schemas.openxmlformats.org/presentationml/2006/main" xmlns:r="http://schemas.openxmlformats.org/officeDocument/2006/relationships">
   <p:cSld>
     <p:spTree>
       <p:nvGrpSpPr>
@@ -805,7 +1204,7 @@
         <p:nvSpPr>
           <p:cNvPr id="2" name="Slide Image Placeholder 1"/>
           <p:cNvSpPr>
-            <a:spLocks noGrp="1" noRot="1" noChangeAspect="1"/>
+            <a:spLocks noGrp="1"/>
           </p:cNvSpPr>
           <p:nvPr>
             <p:ph type="sldImg" idx="2"/>
@@ -820,7 +1219,7 @@
             <a:spLocks noGrp="1"/>
           </p:cNvSpPr>
           <p:nvPr>
-            <p:ph type="body" sz="quarter" idx="3"/>
+            <p:ph type="body" idx="3" sz="quarter"/>
           </p:nvPr>
         </p:nvSpPr>
         <p:spPr/>
@@ -829,7 +1228,72 @@
           <a:lstStyle/>
           <a:p>
             <a:r>
-              <a:t>Passons à la démonstration — je pilote l'application. Je me connecte comme la réception : l'en-tête affiche le nom Alice Tremblay, pas l'e-mail, car le profil vient du serveur. Je crée une disponibilité datée avec une durée, et le système génère tout seul les créneaux réservables. Ensuite je réserve : je choisis le médecin, un créneau libre, je saisis le patient et un motif, et le rendez-vous entre dans l'agenda. Dans le flux du jour, je déroule le cycle de consultation : arrivé, en consultation, terminé. Je montre aussi l'annulation avec motif, qui libère le créneau — une fonctionnalité que nous avons déjà livrée. Enfin, le contrôle d'accès se voit à l'écran : l'entrée « Utilisateurs » disparaît pour un médecin. Et le mode sombre bascule d'un clic. Consigne pratique : naviguer par le menu, éviter de multiplier les rechargements.</a:t>
+              <a:t>LARBI — 2 min — RÈGLE D'OR : PARLER PENDANT QU'ON CLIQUE, JAMAIS APRÈS.</a:t>
+            </a:r>
+          </a:p>
+          <a:p/>
+          <a:p>
+            <a:r>
+              <a:t>1. Connexion réception : « Je me connecte comme la réception. Regardez l'en-tête : Alice Tremblay, son nom — pas son e-mail. Le profil vient du serveur. »</a:t>
+            </a:r>
+          </a:p>
+          <a:p/>
+          <a:p>
+            <a:r>
+              <a:t>2. Tableau de bord : « Le compteur rendez-vous du jour est un vrai chiffre, calculé en base. »</a:t>
+            </a:r>
+          </a:p>
+          <a:p/>
+          <a:p>
+            <a:r>
+              <a:t>3. Disponibilités, créer une plage, puis Voir les créneaux : « Je saisis une plage datée et une durée de créneau. Le système génère seul les créneaux réservables. Je ne les ai pas créés un par un. »</a:t>
+            </a:r>
+          </a:p>
+          <a:p/>
+          <a:p>
+            <a:r>
+              <a:t>4. RÉSERVER — LE SOMMET, RALENTIR ICI : « Le patient appelle. Je le crée au comptoir — pas de compte, pas de mot de passe. Je choisis un créneau libre, un motif, je réserve… » [TEMPS] « …et il est immédiatement dans la journée. C'est le geste réel d'une réceptionniste. »</a:t>
+            </a:r>
+          </a:p>
+          <a:p/>
+          <a:p>
+            <a:r>
+              <a:t>5. Arrivé, Consultation, Terminé : « Et voilà le cycle d'une consultation, tel qu'il se vit au comptoir. »</a:t>
+            </a:r>
+          </a:p>
+          <a:p/>
+          <a:p>
+            <a:r>
+              <a:t>6. Annuler avec motif : « J'annule, avec un motif obligatoire. Le créneau se libère et redevient réservable. »</a:t>
+            </a:r>
+          </a:p>
+          <a:p/>
+          <a:p>
+            <a:r>
+              <a:t>7. Déconnexion puis connexion médecin : « Même application, autre rôle. Regardez le menu : Utilisateurs a disparu. Le contrôle d'accès se voit à l'écran. »</a:t>
+            </a:r>
+          </a:p>
+          <a:p/>
+          <a:p>
+            <a:r>
+              <a:t>8. Mode sombre : « Et le thème sombre, en un clic, sur toute l'application. »</a:t>
+            </a:r>
+          </a:p>
+          <a:p/>
+          <a:p>
+            <a:r>
+              <a:t>PRATIQUE : naviguer par le menu de gauche, éviter les rechargements de page.</a:t>
+            </a:r>
+          </a:p>
+          <a:p>
+            <a:r>
+              <a:t>SI ÇA PLANTE : « Le temps que ça revienne, je vous explique ce qui se passe derrière. » — ne jamais déboguer en direct.</a:t>
+            </a:r>
+          </a:p>
+          <a:p/>
+          <a:p>
+            <a:r>
+              <a:t>→ TRANSITION : « Ça, c'est ce que vous voyez. Voyons ce qu'on a vérifié. »</a:t>
             </a:r>
           </a:p>
         </p:txBody>
@@ -841,7 +1305,7 @@
             <a:spLocks noGrp="1"/>
           </p:cNvSpPr>
           <p:nvPr>
-            <p:ph type="sldNum" sz="quarter" idx="5"/>
+            <p:ph type="sldNum" idx="5" sz="quarter"/>
           </p:nvPr>
         </p:nvSpPr>
         <p:spPr/>
@@ -855,7 +1319,7 @@
 </file>
 
 <file path=ppt/notesSlides/notesSlide7.xml><?xml version="1.0" encoding="utf-8"?>
-<p:notes xmlns:a="http://schemas.openxmlformats.org/drawingml/2006/main" xmlns:r="http://schemas.openxmlformats.org/officeDocument/2006/relationships" xmlns:p="http://schemas.openxmlformats.org/presentationml/2006/main">
+<p:notes xmlns:a="http://schemas.openxmlformats.org/drawingml/2006/main" xmlns:p="http://schemas.openxmlformats.org/presentationml/2006/main" xmlns:r="http://schemas.openxmlformats.org/officeDocument/2006/relationships">
   <p:cSld>
     <p:spTree>
       <p:nvGrpSpPr>
@@ -875,7 +1339,7 @@
         <p:nvSpPr>
           <p:cNvPr id="2" name="Slide Image Placeholder 1"/>
           <p:cNvSpPr>
-            <a:spLocks noGrp="1" noRot="1" noChangeAspect="1"/>
+            <a:spLocks noGrp="1"/>
           </p:cNvSpPr>
           <p:nvPr>
             <p:ph type="sldImg" idx="2"/>
@@ -890,7 +1354,7 @@
             <a:spLocks noGrp="1"/>
           </p:cNvSpPr>
           <p:nvPr>
-            <p:ph type="body" sz="quarter" idx="3"/>
+            <p:ph type="body" idx="3" sz="quarter"/>
           </p:nvPr>
         </p:nvSpPr>
         <p:spPr/>
@@ -899,7 +1363,37 @@
           <a:lstStyle/>
           <a:p>
             <a:r>
-              <a:t>Côté tests, nous avons 171 tests automatisés qui passent : 48 sur le backend, 123 sur le frontend, zéro en échec. Sur le backend, nous testons les services et les contrôleurs — authentification, disponibilités, réservation, flux — et la validation des données. Le point important : l'anti-double-réservation est testé en situation de concurrence, deux réservations simultanées sur le même créneau. Sur le frontend, nous testons les composants, les services, les guards de rôle et les intercepteurs. Nous complétons par des vérifications manuelles dans le navigateur. Nous avons aussi trouvé et corrigé de vrais bogues : une erreur 500 à la réservation due à un verrou SQL mal placé ; un sélecteur de médecin qui ne s'ouvrait pas parce que l'étiquette captait le clic ; des rendez-vous du jour vides à cause du fuseau horaire ; l'en-tête qui affichait l'e-mail au lieu du nom ; et un motif d'annulation vide accepté. Tous corrigés.</a:t>
+              <a:t>LARBI — 1 min 30</a:t>
+            </a:r>
+          </a:p>
+          <a:p/>
+          <a:p>
+            <a:r>
+              <a:t>« 171 tests automatisés, tous verts : 48 sur le backend, 123 sur le frontend, zéro en échec. »</a:t>
+            </a:r>
+          </a:p>
+          <a:p/>
+          <a:p>
+            <a:r>
+              <a:t>« Le test dont nous sommes le plus fiers : la réservation en concurrence. Deux réservations lancées sur le même créneau au même instant — une passe, l'autre est refusée. »</a:t>
+            </a:r>
+          </a:p>
+          <a:p/>
+          <a:p>
+            <a:r>
+              <a:t>« Et nous avons trouvé de vrais bogues, que nous avons corrigés : une erreur 500 causée par un verrou SQL mal placé ; un sélecteur de médecin qui ne s'ouvrait pas parce que l'étiquette captait le clic ; des rendez-vous du jour vides à cause d'un problème de fuseau horaire. Tous corrigés. »</a:t>
+            </a:r>
+          </a:p>
+          <a:p/>
+          <a:p>
+            <a:r>
+              <a:t>POURQUOI CITER LES BOGUES : une équipe qui nomme ses bogues prouve qu'elle a réellement testé. Une équipe qui n'en cite aucun n'a testé que le chemin heureux.</a:t>
+            </a:r>
+          </a:p>
+          <a:p/>
+          <a:p>
+            <a:r>
+              <a:t>→ TRANSITION : « Souleymane va vous parler de ce qui a été le plus dur. »</a:t>
             </a:r>
           </a:p>
         </p:txBody>
@@ -911,7 +1405,7 @@
             <a:spLocks noGrp="1"/>
           </p:cNvSpPr>
           <p:nvPr>
-            <p:ph type="sldNum" sz="quarter" idx="5"/>
+            <p:ph type="sldNum" idx="5" sz="quarter"/>
           </p:nvPr>
         </p:nvSpPr>
         <p:spPr/>
@@ -925,7 +1419,7 @@
 </file>
 
 <file path=ppt/notesSlides/notesSlide8.xml><?xml version="1.0" encoding="utf-8"?>
-<p:notes xmlns:a="http://schemas.openxmlformats.org/drawingml/2006/main" xmlns:r="http://schemas.openxmlformats.org/officeDocument/2006/relationships" xmlns:p="http://schemas.openxmlformats.org/presentationml/2006/main">
+<p:notes xmlns:a="http://schemas.openxmlformats.org/drawingml/2006/main" xmlns:p="http://schemas.openxmlformats.org/presentationml/2006/main" xmlns:r="http://schemas.openxmlformats.org/officeDocument/2006/relationships">
   <p:cSld>
     <p:spTree>
       <p:nvGrpSpPr>
@@ -945,7 +1439,7 @@
         <p:nvSpPr>
           <p:cNvPr id="2" name="Slide Image Placeholder 1"/>
           <p:cNvSpPr>
-            <a:spLocks noGrp="1" noRot="1" noChangeAspect="1"/>
+            <a:spLocks noGrp="1"/>
           </p:cNvSpPr>
           <p:nvPr>
             <p:ph type="sldImg" idx="2"/>
@@ -960,7 +1454,7 @@
             <a:spLocks noGrp="1"/>
           </p:cNvSpPr>
           <p:nvPr>
-            <p:ph type="body" sz="quarter" idx="3"/>
+            <p:ph type="body" idx="3" sz="quarter"/>
           </p:nvPr>
         </p:nvSpPr>
         <p:spPr/>
@@ -969,7 +1463,43 @@
           <a:lstStyle/>
           <a:p>
             <a:r>
-              <a:t>Nos difficultés, en toute transparence. Sur l'organisation d'abord : au départ, plusieurs branches ont vécu en parallèle sans être fusionnées, ce qui a produit des migrations en double et un module recréé deux fois. Nous avons dû tout réintégrer à la main, et surtout nous en avons tiré six règles de travail que nous appliquons depuis : le code qui touche la base passe en premier, aucune branche ne vit plus de trois jours sans être proposée à la fusion, un seul module par tâche, et on ne fusionne que si les tests passent. Sur la technique, la vraie question était la réservation concurrente : empêcher deux personnes de prendre le même créneau au même instant. Notre solution : c'est la base de données qui tric — un index unique et une transaction avec verrou. On l'a vérifié par un test de concurrence. Nous avons aussi levé plusieurs bogues plus pointus, comme un verrou SQL mal placé et une dépendance circulaire au démarrage.</a:t>
+              <a:t>SOULEYMANE — 1 min 30 — VOTRE MOMENT. RALENTIR, REGARDER LA SALLE, NE PAS S'EXCUSER.</a:t>
+            </a:r>
+          </a:p>
+          <a:p/>
+          <a:p>
+            <a:r>
+              <a:t>« Notre difficulté la plus sérieuse n'a pas été technique. Elle a été d'organisation. »</a:t>
+            </a:r>
+          </a:p>
+          <a:p/>
+          <a:p>
+            <a:r>
+              <a:t>[ TEMPS ]</a:t>
+            </a:r>
+          </a:p>
+          <a:p/>
+          <a:p>
+            <a:r>
+              <a:t>« Au début du sprint, nous avons travaillé chacun sur notre branche, et nous ne les avons pas fusionnées assez tôt. Résultat : deux migrations sur le même horodatage, et un module de rendez-vous écrit deux fois par deux personnes différentes, sans qu'on le sache. Nous avons perdu une journée entière à réintégrer au lieu de développer. »</a:t>
+            </a:r>
+          </a:p>
+          <a:p/>
+          <a:p>
+            <a:r>
+              <a:t>« Nous en avons tiré six règles, que nous appliquons depuis : le code qui touche la base passe en premier ; aucune branche ne vit plus de trois jours sans être proposée à la fusion ; un seul module par ticket ; on ne fusionne que si les tests passent ; un point d'intégration à mi-sprint. Et surtout, notre définition de terminé a changé : terminé, ça ne veut plus dire codé sur ma machine, ça veut dire fusionné dans la branche commune. »</a:t>
+            </a:r>
+          </a:p>
+          <a:p/>
+          <a:p>
+            <a:r>
+              <a:t>« Côté technique, la vraie question était : comment empêcher deux réceptions de réserver le même créneau au même instant ? Notre réponse, c'est de ne pas laisser notre code arbitrer. C'est PostgreSQL qui tranche la course, avec un index unique et une transaction. Vérifié par un test de concurrence. »</a:t>
+            </a:r>
+          </a:p>
+          <a:p/>
+          <a:p>
+            <a:r>
+              <a:t>→ TRANSITION : « Voyons maintenant où ça nous mène dans Jira. »</a:t>
             </a:r>
           </a:p>
         </p:txBody>
@@ -981,7 +1511,7 @@
             <a:spLocks noGrp="1"/>
           </p:cNvSpPr>
           <p:nvPr>
-            <p:ph type="sldNum" sz="quarter" idx="5"/>
+            <p:ph type="sldNum" idx="5" sz="quarter"/>
           </p:nvPr>
         </p:nvSpPr>
         <p:spPr/>
@@ -995,7 +1525,7 @@
 </file>
 
 <file path=ppt/notesSlides/notesSlide9.xml><?xml version="1.0" encoding="utf-8"?>
-<p:notes xmlns:a="http://schemas.openxmlformats.org/drawingml/2006/main" xmlns:r="http://schemas.openxmlformats.org/officeDocument/2006/relationships" xmlns:p="http://schemas.openxmlformats.org/presentationml/2006/main">
+<p:notes xmlns:a="http://schemas.openxmlformats.org/drawingml/2006/main" xmlns:p="http://schemas.openxmlformats.org/presentationml/2006/main" xmlns:r="http://schemas.openxmlformats.org/officeDocument/2006/relationships">
   <p:cSld>
     <p:spTree>
       <p:nvGrpSpPr>
@@ -1015,7 +1545,7 @@
         <p:nvSpPr>
           <p:cNvPr id="2" name="Slide Image Placeholder 1"/>
           <p:cNvSpPr>
-            <a:spLocks noGrp="1" noRot="1" noChangeAspect="1"/>
+            <a:spLocks noGrp="1"/>
           </p:cNvSpPr>
           <p:nvPr>
             <p:ph type="sldImg" idx="2"/>
@@ -1030,7 +1560,7 @@
             <a:spLocks noGrp="1"/>
           </p:cNvSpPr>
           <p:nvPr>
-            <p:ph type="body" sz="quarter" idx="3"/>
+            <p:ph type="body" idx="3" sz="quarter"/>
           </p:nvPr>
         </p:nvSpPr>
         <p:spPr/>
@@ -1039,7 +1569,31 @@
           <a:lstStyle/>
           <a:p>
             <a:r>
-              <a:t>Dans Jira, le Sprint 2 est terminé à 86 pour cent : 18 tickets sur 21. La répartition : j'ai porté l'authentification, la réservation avec l'anti-double-réservation, la mise en place du monorepo et Docker, et l'intégration. Zakaria a fait les disponibilités des médecins et le flux du jour. Larbi a modélisé le patient léger, la réservation par la réception et le socle technique des rendez-vous. Le frontend d'authentification et la refonte de l'interface ont été un effort partagé. Trois tickets passent au Sprint 3 : la gestion des médecins par l'admin, une précision de documentation, et les variables d'environnement — aucun n'est bloquant. Une notification interne est déjà en cours, et nous avons même livré l'annulation en avance ; nous mettrons Jira à jour en conséquence.</a:t>
+              <a:t>SOULEYMANE — 1 min — NOMMER CHAQUE PERSONNE À VOIX HAUTE (exigence de la consigne).</a:t>
+            </a:r>
+          </a:p>
+          <a:p/>
+          <a:p>
+            <a:r>
+              <a:t>« 18 tickets terminés sur 21, environ 86 % du sprint. »</a:t>
+            </a:r>
+          </a:p>
+          <a:p/>
+          <a:p>
+            <a:r>
+              <a:t>« La répartition : j'ai porté l'authentification, la réservation avec l'anti-double-réservation, la mise en place du monorepo et de Docker, et l'intégration. Zakaria a fait les disponibilités des médecins et le flux clinique du jour. Larbi a modélisé le patient léger, la réservation par la réception et le socle technique des rendez-vous. Le frontend d'authentification et la refonte de l'interface, c'est un effort partagé. »</a:t>
+            </a:r>
+          </a:p>
+          <a:p/>
+          <a:p>
+            <a:r>
+              <a:t>« Trois tickets passent au Sprint 3 : la gestion des médecins par l'administrateur, une précision de documentation, et les variables d'environnement. Aucun n'est bloquant, et nous les assumons comme tels. Et nous avons même livré l'annulation en avance sur le planning. »</a:t>
+            </a:r>
+          </a:p>
+          <a:p/>
+          <a:p>
+            <a:r>
+              <a:t>→ TRANSITION : « Zakaria, pour la suite. »</a:t>
             </a:r>
           </a:p>
         </p:txBody>
@@ -1051,7 +1605,7 @@
             <a:spLocks noGrp="1"/>
           </p:cNvSpPr>
           <p:nvPr>
-            <p:ph type="sldNum" sz="quarter" idx="5"/>
+            <p:ph type="sldNum" idx="5" sz="quarter"/>
           </p:nvPr>
         </p:nvSpPr>
         <p:spPr/>
@@ -1102,9 +1656,10 @@
           <a:lstStyle/>
           <a:p>
             <a:r>
-              <a:rPr lang="en-US"/>
+              <a:rPr lang="en-US" smtClean="0"/>
               <a:t>Click to edit Master title style</a:t>
             </a:r>
+            <a:endParaRPr lang="en-US"/>
           </a:p>
         </p:txBody>
       </p:sp>
@@ -1220,9 +1775,10 @@
           </a:lstStyle>
           <a:p>
             <a:r>
-              <a:rPr lang="en-US"/>
+              <a:rPr lang="en-US" smtClean="0"/>
               <a:t>Click to edit Master subtitle style</a:t>
             </a:r>
+            <a:endParaRPr lang="en-US"/>
           </a:p>
         </p:txBody>
       </p:sp>
@@ -1243,7 +1799,7 @@
           <a:p>
             <a:fld id="{5BCAD085-E8A6-8845-BD4E-CB4CCA059FC4}" type="datetimeFigureOut">
               <a:rPr lang="en-US" smtClean="0"/>
-              <a:t>7/22/2026</a:t>
+              <a:t>1/27/13</a:t>
             </a:fld>
             <a:endParaRPr lang="en-US"/>
           </a:p>
@@ -1285,7 +1841,7 @@
           <a:p>
             <a:fld id="{C1FF6DA9-008F-8B48-92A6-B652298478BF}" type="slidenum">
               <a:rPr lang="en-US" smtClean="0"/>
-              <a:t>‹N°›</a:t>
+              <a:t>‹#›</a:t>
             </a:fld>
             <a:endParaRPr lang="en-US"/>
           </a:p>
@@ -1337,9 +1893,10 @@
           <a:lstStyle/>
           <a:p>
             <a:r>
-              <a:rPr lang="en-US"/>
+              <a:rPr lang="en-US" smtClean="0"/>
               <a:t>Click to edit Master title style</a:t>
             </a:r>
+            <a:endParaRPr lang="en-US"/>
           </a:p>
         </p:txBody>
       </p:sp>
@@ -1360,37 +1917,38 @@
           <a:p>
             <a:pPr lvl="0"/>
             <a:r>
-              <a:rPr lang="en-US"/>
+              <a:rPr lang="en-US" smtClean="0"/>
               <a:t>Click to edit Master text styles</a:t>
             </a:r>
           </a:p>
           <a:p>
             <a:pPr lvl="1"/>
             <a:r>
-              <a:rPr lang="en-US"/>
+              <a:rPr lang="en-US" smtClean="0"/>
               <a:t>Second level</a:t>
             </a:r>
           </a:p>
           <a:p>
             <a:pPr lvl="2"/>
             <a:r>
-              <a:rPr lang="en-US"/>
+              <a:rPr lang="en-US" smtClean="0"/>
               <a:t>Third level</a:t>
             </a:r>
           </a:p>
           <a:p>
             <a:pPr lvl="3"/>
             <a:r>
-              <a:rPr lang="en-US"/>
+              <a:rPr lang="en-US" smtClean="0"/>
               <a:t>Fourth level</a:t>
             </a:r>
           </a:p>
           <a:p>
             <a:pPr lvl="4"/>
             <a:r>
-              <a:rPr lang="en-US"/>
+              <a:rPr lang="en-US" smtClean="0"/>
               <a:t>Fifth level</a:t>
             </a:r>
+            <a:endParaRPr lang="en-US"/>
           </a:p>
         </p:txBody>
       </p:sp>
@@ -1411,7 +1969,7 @@
           <a:p>
             <a:fld id="{5BCAD085-E8A6-8845-BD4E-CB4CCA059FC4}" type="datetimeFigureOut">
               <a:rPr lang="en-US" smtClean="0"/>
-              <a:t>7/22/2026</a:t>
+              <a:t>1/27/13</a:t>
             </a:fld>
             <a:endParaRPr lang="en-US"/>
           </a:p>
@@ -1453,7 +2011,7 @@
           <a:p>
             <a:fld id="{C1FF6DA9-008F-8B48-92A6-B652298478BF}" type="slidenum">
               <a:rPr lang="en-US" smtClean="0"/>
-              <a:t>‹N°›</a:t>
+              <a:t>‹#›</a:t>
             </a:fld>
             <a:endParaRPr lang="en-US"/>
           </a:p>
@@ -1510,9 +2068,10 @@
           <a:lstStyle/>
           <a:p>
             <a:r>
-              <a:rPr lang="en-US"/>
+              <a:rPr lang="en-US" smtClean="0"/>
               <a:t>Click to edit Master title style</a:t>
             </a:r>
+            <a:endParaRPr lang="en-US"/>
           </a:p>
         </p:txBody>
       </p:sp>
@@ -1538,37 +2097,38 @@
           <a:p>
             <a:pPr lvl="0"/>
             <a:r>
-              <a:rPr lang="en-US"/>
+              <a:rPr lang="en-US" smtClean="0"/>
               <a:t>Click to edit Master text styles</a:t>
             </a:r>
           </a:p>
           <a:p>
             <a:pPr lvl="1"/>
             <a:r>
-              <a:rPr lang="en-US"/>
+              <a:rPr lang="en-US" smtClean="0"/>
               <a:t>Second level</a:t>
             </a:r>
           </a:p>
           <a:p>
             <a:pPr lvl="2"/>
             <a:r>
-              <a:rPr lang="en-US"/>
+              <a:rPr lang="en-US" smtClean="0"/>
               <a:t>Third level</a:t>
             </a:r>
           </a:p>
           <a:p>
             <a:pPr lvl="3"/>
             <a:r>
-              <a:rPr lang="en-US"/>
+              <a:rPr lang="en-US" smtClean="0"/>
               <a:t>Fourth level</a:t>
             </a:r>
           </a:p>
           <a:p>
             <a:pPr lvl="4"/>
             <a:r>
-              <a:rPr lang="en-US"/>
+              <a:rPr lang="en-US" smtClean="0"/>
               <a:t>Fifth level</a:t>
             </a:r>
+            <a:endParaRPr lang="en-US"/>
           </a:p>
         </p:txBody>
       </p:sp>
@@ -1589,7 +2149,7 @@
           <a:p>
             <a:fld id="{5BCAD085-E8A6-8845-BD4E-CB4CCA059FC4}" type="datetimeFigureOut">
               <a:rPr lang="en-US" smtClean="0"/>
-              <a:t>7/22/2026</a:t>
+              <a:t>1/27/13</a:t>
             </a:fld>
             <a:endParaRPr lang="en-US"/>
           </a:p>
@@ -1631,7 +2191,7 @@
           <a:p>
             <a:fld id="{C1FF6DA9-008F-8B48-92A6-B652298478BF}" type="slidenum">
               <a:rPr lang="en-US" smtClean="0"/>
-              <a:t>‹N°›</a:t>
+              <a:t>‹#›</a:t>
             </a:fld>
             <a:endParaRPr lang="en-US"/>
           </a:p>
@@ -1683,9 +2243,10 @@
           <a:lstStyle/>
           <a:p>
             <a:r>
-              <a:rPr lang="en-US"/>
+              <a:rPr lang="en-US" smtClean="0"/>
               <a:t>Click to edit Master title style</a:t>
             </a:r>
+            <a:endParaRPr lang="en-US"/>
           </a:p>
         </p:txBody>
       </p:sp>
@@ -1706,37 +2267,38 @@
           <a:p>
             <a:pPr lvl="0"/>
             <a:r>
-              <a:rPr lang="en-US"/>
+              <a:rPr lang="en-US" smtClean="0"/>
               <a:t>Click to edit Master text styles</a:t>
             </a:r>
           </a:p>
           <a:p>
             <a:pPr lvl="1"/>
             <a:r>
-              <a:rPr lang="en-US"/>
+              <a:rPr lang="en-US" smtClean="0"/>
               <a:t>Second level</a:t>
             </a:r>
           </a:p>
           <a:p>
             <a:pPr lvl="2"/>
             <a:r>
-              <a:rPr lang="en-US"/>
+              <a:rPr lang="en-US" smtClean="0"/>
               <a:t>Third level</a:t>
             </a:r>
           </a:p>
           <a:p>
             <a:pPr lvl="3"/>
             <a:r>
-              <a:rPr lang="en-US"/>
+              <a:rPr lang="en-US" smtClean="0"/>
               <a:t>Fourth level</a:t>
             </a:r>
           </a:p>
           <a:p>
             <a:pPr lvl="4"/>
             <a:r>
-              <a:rPr lang="en-US"/>
+              <a:rPr lang="en-US" smtClean="0"/>
               <a:t>Fifth level</a:t>
             </a:r>
+            <a:endParaRPr lang="en-US"/>
           </a:p>
         </p:txBody>
       </p:sp>
@@ -1757,7 +2319,7 @@
           <a:p>
             <a:fld id="{5BCAD085-E8A6-8845-BD4E-CB4CCA059FC4}" type="datetimeFigureOut">
               <a:rPr lang="en-US" smtClean="0"/>
-              <a:t>7/22/2026</a:t>
+              <a:t>1/27/13</a:t>
             </a:fld>
             <a:endParaRPr lang="en-US"/>
           </a:p>
@@ -1799,7 +2361,7 @@
           <a:p>
             <a:fld id="{C1FF6DA9-008F-8B48-92A6-B652298478BF}" type="slidenum">
               <a:rPr lang="en-US" smtClean="0"/>
-              <a:t>‹N°›</a:t>
+              <a:t>‹#›</a:t>
             </a:fld>
             <a:endParaRPr lang="en-US"/>
           </a:p>
@@ -1860,9 +2422,10 @@
           </a:lstStyle>
           <a:p>
             <a:r>
-              <a:rPr lang="en-US"/>
+              <a:rPr lang="en-US" smtClean="0"/>
               <a:t>Click to edit Master title style</a:t>
             </a:r>
+            <a:endParaRPr lang="en-US"/>
           </a:p>
         </p:txBody>
       </p:sp>
@@ -1979,7 +2542,7 @@
           <a:p>
             <a:pPr lvl="0"/>
             <a:r>
-              <a:rPr lang="en-US"/>
+              <a:rPr lang="en-US" smtClean="0"/>
               <a:t>Click to edit Master text styles</a:t>
             </a:r>
           </a:p>
@@ -2002,7 +2565,7 @@
           <a:p>
             <a:fld id="{5BCAD085-E8A6-8845-BD4E-CB4CCA059FC4}" type="datetimeFigureOut">
               <a:rPr lang="en-US" smtClean="0"/>
-              <a:t>7/22/2026</a:t>
+              <a:t>1/27/13</a:t>
             </a:fld>
             <a:endParaRPr lang="en-US"/>
           </a:p>
@@ -2044,7 +2607,7 @@
           <a:p>
             <a:fld id="{C1FF6DA9-008F-8B48-92A6-B652298478BF}" type="slidenum">
               <a:rPr lang="en-US" smtClean="0"/>
-              <a:t>‹N°›</a:t>
+              <a:t>‹#›</a:t>
             </a:fld>
             <a:endParaRPr lang="en-US"/>
           </a:p>
@@ -2096,9 +2659,10 @@
           <a:lstStyle/>
           <a:p>
             <a:r>
-              <a:rPr lang="en-US"/>
+              <a:rPr lang="en-US" smtClean="0"/>
               <a:t>Click to edit Master title style</a:t>
             </a:r>
+            <a:endParaRPr lang="en-US"/>
           </a:p>
         </p:txBody>
       </p:sp>
@@ -2152,37 +2716,38 @@
           <a:p>
             <a:pPr lvl="0"/>
             <a:r>
-              <a:rPr lang="en-US"/>
+              <a:rPr lang="en-US" smtClean="0"/>
               <a:t>Click to edit Master text styles</a:t>
             </a:r>
           </a:p>
           <a:p>
             <a:pPr lvl="1"/>
             <a:r>
-              <a:rPr lang="en-US"/>
+              <a:rPr lang="en-US" smtClean="0"/>
               <a:t>Second level</a:t>
             </a:r>
           </a:p>
           <a:p>
             <a:pPr lvl="2"/>
             <a:r>
-              <a:rPr lang="en-US"/>
+              <a:rPr lang="en-US" smtClean="0"/>
               <a:t>Third level</a:t>
             </a:r>
           </a:p>
           <a:p>
             <a:pPr lvl="3"/>
             <a:r>
-              <a:rPr lang="en-US"/>
+              <a:rPr lang="en-US" smtClean="0"/>
               <a:t>Fourth level</a:t>
             </a:r>
           </a:p>
           <a:p>
             <a:pPr lvl="4"/>
             <a:r>
-              <a:rPr lang="en-US"/>
+              <a:rPr lang="en-US" smtClean="0"/>
               <a:t>Fifth level</a:t>
             </a:r>
+            <a:endParaRPr lang="en-US"/>
           </a:p>
         </p:txBody>
       </p:sp>
@@ -2236,37 +2801,38 @@
           <a:p>
             <a:pPr lvl="0"/>
             <a:r>
-              <a:rPr lang="en-US"/>
+              <a:rPr lang="en-US" smtClean="0"/>
               <a:t>Click to edit Master text styles</a:t>
             </a:r>
           </a:p>
           <a:p>
             <a:pPr lvl="1"/>
             <a:r>
-              <a:rPr lang="en-US"/>
+              <a:rPr lang="en-US" smtClean="0"/>
               <a:t>Second level</a:t>
             </a:r>
           </a:p>
           <a:p>
             <a:pPr lvl="2"/>
             <a:r>
-              <a:rPr lang="en-US"/>
+              <a:rPr lang="en-US" smtClean="0"/>
               <a:t>Third level</a:t>
             </a:r>
           </a:p>
           <a:p>
             <a:pPr lvl="3"/>
             <a:r>
-              <a:rPr lang="en-US"/>
+              <a:rPr lang="en-US" smtClean="0"/>
               <a:t>Fourth level</a:t>
             </a:r>
           </a:p>
           <a:p>
             <a:pPr lvl="4"/>
             <a:r>
-              <a:rPr lang="en-US"/>
+              <a:rPr lang="en-US" smtClean="0"/>
               <a:t>Fifth level</a:t>
             </a:r>
+            <a:endParaRPr lang="en-US"/>
           </a:p>
         </p:txBody>
       </p:sp>
@@ -2287,7 +2853,7 @@
           <a:p>
             <a:fld id="{5BCAD085-E8A6-8845-BD4E-CB4CCA059FC4}" type="datetimeFigureOut">
               <a:rPr lang="en-US" smtClean="0"/>
-              <a:t>7/22/2026</a:t>
+              <a:t>1/27/13</a:t>
             </a:fld>
             <a:endParaRPr lang="en-US"/>
           </a:p>
@@ -2329,7 +2895,7 @@
           <a:p>
             <a:fld id="{C1FF6DA9-008F-8B48-92A6-B652298478BF}" type="slidenum">
               <a:rPr lang="en-US" smtClean="0"/>
-              <a:t>‹N°›</a:t>
+              <a:t>‹#›</a:t>
             </a:fld>
             <a:endParaRPr lang="en-US"/>
           </a:p>
@@ -2385,9 +2951,10 @@
           </a:lstStyle>
           <a:p>
             <a:r>
-              <a:rPr lang="en-US"/>
+              <a:rPr lang="en-US" smtClean="0"/>
               <a:t>Click to edit Master title style</a:t>
             </a:r>
+            <a:endParaRPr lang="en-US"/>
           </a:p>
         </p:txBody>
       </p:sp>
@@ -2450,7 +3017,7 @@
           <a:p>
             <a:pPr lvl="0"/>
             <a:r>
-              <a:rPr lang="en-US"/>
+              <a:rPr lang="en-US" smtClean="0"/>
               <a:t>Click to edit Master text styles</a:t>
             </a:r>
           </a:p>
@@ -2506,37 +3073,38 @@
           <a:p>
             <a:pPr lvl="0"/>
             <a:r>
-              <a:rPr lang="en-US"/>
+              <a:rPr lang="en-US" smtClean="0"/>
               <a:t>Click to edit Master text styles</a:t>
             </a:r>
           </a:p>
           <a:p>
             <a:pPr lvl="1"/>
             <a:r>
-              <a:rPr lang="en-US"/>
+              <a:rPr lang="en-US" smtClean="0"/>
               <a:t>Second level</a:t>
             </a:r>
           </a:p>
           <a:p>
             <a:pPr lvl="2"/>
             <a:r>
-              <a:rPr lang="en-US"/>
+              <a:rPr lang="en-US" smtClean="0"/>
               <a:t>Third level</a:t>
             </a:r>
           </a:p>
           <a:p>
             <a:pPr lvl="3"/>
             <a:r>
-              <a:rPr lang="en-US"/>
+              <a:rPr lang="en-US" smtClean="0"/>
               <a:t>Fourth level</a:t>
             </a:r>
           </a:p>
           <a:p>
             <a:pPr lvl="4"/>
             <a:r>
-              <a:rPr lang="en-US"/>
+              <a:rPr lang="en-US" smtClean="0"/>
               <a:t>Fifth level</a:t>
             </a:r>
+            <a:endParaRPr lang="en-US"/>
           </a:p>
         </p:txBody>
       </p:sp>
@@ -2599,7 +3167,7 @@
           <a:p>
             <a:pPr lvl="0"/>
             <a:r>
-              <a:rPr lang="en-US"/>
+              <a:rPr lang="en-US" smtClean="0"/>
               <a:t>Click to edit Master text styles</a:t>
             </a:r>
           </a:p>
@@ -2655,37 +3223,38 @@
           <a:p>
             <a:pPr lvl="0"/>
             <a:r>
-              <a:rPr lang="en-US"/>
+              <a:rPr lang="en-US" smtClean="0"/>
               <a:t>Click to edit Master text styles</a:t>
             </a:r>
           </a:p>
           <a:p>
             <a:pPr lvl="1"/>
             <a:r>
-              <a:rPr lang="en-US"/>
+              <a:rPr lang="en-US" smtClean="0"/>
               <a:t>Second level</a:t>
             </a:r>
           </a:p>
           <a:p>
             <a:pPr lvl="2"/>
             <a:r>
-              <a:rPr lang="en-US"/>
+              <a:rPr lang="en-US" smtClean="0"/>
               <a:t>Third level</a:t>
             </a:r>
           </a:p>
           <a:p>
             <a:pPr lvl="3"/>
             <a:r>
-              <a:rPr lang="en-US"/>
+              <a:rPr lang="en-US" smtClean="0"/>
               <a:t>Fourth level</a:t>
             </a:r>
           </a:p>
           <a:p>
             <a:pPr lvl="4"/>
             <a:r>
-              <a:rPr lang="en-US"/>
+              <a:rPr lang="en-US" smtClean="0"/>
               <a:t>Fifth level</a:t>
             </a:r>
+            <a:endParaRPr lang="en-US"/>
           </a:p>
         </p:txBody>
       </p:sp>
@@ -2706,7 +3275,7 @@
           <a:p>
             <a:fld id="{5BCAD085-E8A6-8845-BD4E-CB4CCA059FC4}" type="datetimeFigureOut">
               <a:rPr lang="en-US" smtClean="0"/>
-              <a:t>7/22/2026</a:t>
+              <a:t>1/27/13</a:t>
             </a:fld>
             <a:endParaRPr lang="en-US"/>
           </a:p>
@@ -2748,7 +3317,7 @@
           <a:p>
             <a:fld id="{C1FF6DA9-008F-8B48-92A6-B652298478BF}" type="slidenum">
               <a:rPr lang="en-US" smtClean="0"/>
-              <a:t>‹N°›</a:t>
+              <a:t>‹#›</a:t>
             </a:fld>
             <a:endParaRPr lang="en-US"/>
           </a:p>
@@ -2800,9 +3369,10 @@
           <a:lstStyle/>
           <a:p>
             <a:r>
-              <a:rPr lang="en-US"/>
+              <a:rPr lang="en-US" smtClean="0"/>
               <a:t>Click to edit Master title style</a:t>
             </a:r>
+            <a:endParaRPr lang="en-US"/>
           </a:p>
         </p:txBody>
       </p:sp>
@@ -2823,7 +3393,7 @@
           <a:p>
             <a:fld id="{5BCAD085-E8A6-8845-BD4E-CB4CCA059FC4}" type="datetimeFigureOut">
               <a:rPr lang="en-US" smtClean="0"/>
-              <a:t>7/22/2026</a:t>
+              <a:t>1/27/13</a:t>
             </a:fld>
             <a:endParaRPr lang="en-US"/>
           </a:p>
@@ -2865,7 +3435,7 @@
           <a:p>
             <a:fld id="{C1FF6DA9-008F-8B48-92A6-B652298478BF}" type="slidenum">
               <a:rPr lang="en-US" smtClean="0"/>
-              <a:t>‹N°›</a:t>
+              <a:t>‹#›</a:t>
             </a:fld>
             <a:endParaRPr lang="en-US"/>
           </a:p>
@@ -2918,7 +3488,7 @@
           <a:p>
             <a:fld id="{5BCAD085-E8A6-8845-BD4E-CB4CCA059FC4}" type="datetimeFigureOut">
               <a:rPr lang="en-US" smtClean="0"/>
-              <a:t>7/22/2026</a:t>
+              <a:t>1/27/13</a:t>
             </a:fld>
             <a:endParaRPr lang="en-US"/>
           </a:p>
@@ -2960,7 +3530,7 @@
           <a:p>
             <a:fld id="{C1FF6DA9-008F-8B48-92A6-B652298478BF}" type="slidenum">
               <a:rPr lang="en-US" smtClean="0"/>
-              <a:t>‹N°›</a:t>
+              <a:t>‹#›</a:t>
             </a:fld>
             <a:endParaRPr lang="en-US"/>
           </a:p>
@@ -3021,9 +3591,10 @@
           </a:lstStyle>
           <a:p>
             <a:r>
-              <a:rPr lang="en-US"/>
+              <a:rPr lang="en-US" smtClean="0"/>
               <a:t>Click to edit Master title style</a:t>
             </a:r>
+            <a:endParaRPr lang="en-US"/>
           </a:p>
         </p:txBody>
       </p:sp>
@@ -3077,37 +3648,38 @@
           <a:p>
             <a:pPr lvl="0"/>
             <a:r>
-              <a:rPr lang="en-US"/>
+              <a:rPr lang="en-US" smtClean="0"/>
               <a:t>Click to edit Master text styles</a:t>
             </a:r>
           </a:p>
           <a:p>
             <a:pPr lvl="1"/>
             <a:r>
-              <a:rPr lang="en-US"/>
+              <a:rPr lang="en-US" smtClean="0"/>
               <a:t>Second level</a:t>
             </a:r>
           </a:p>
           <a:p>
             <a:pPr lvl="2"/>
             <a:r>
-              <a:rPr lang="en-US"/>
+              <a:rPr lang="en-US" smtClean="0"/>
               <a:t>Third level</a:t>
             </a:r>
           </a:p>
           <a:p>
             <a:pPr lvl="3"/>
             <a:r>
-              <a:rPr lang="en-US"/>
+              <a:rPr lang="en-US" smtClean="0"/>
               <a:t>Fourth level</a:t>
             </a:r>
           </a:p>
           <a:p>
             <a:pPr lvl="4"/>
             <a:r>
-              <a:rPr lang="en-US"/>
+              <a:rPr lang="en-US" smtClean="0"/>
               <a:t>Fifth level</a:t>
             </a:r>
+            <a:endParaRPr lang="en-US"/>
           </a:p>
         </p:txBody>
       </p:sp>
@@ -3170,7 +3742,7 @@
           <a:p>
             <a:pPr lvl="0"/>
             <a:r>
-              <a:rPr lang="en-US"/>
+              <a:rPr lang="en-US" smtClean="0"/>
               <a:t>Click to edit Master text styles</a:t>
             </a:r>
           </a:p>
@@ -3193,7 +3765,7 @@
           <a:p>
             <a:fld id="{5BCAD085-E8A6-8845-BD4E-CB4CCA059FC4}" type="datetimeFigureOut">
               <a:rPr lang="en-US" smtClean="0"/>
-              <a:t>7/22/2026</a:t>
+              <a:t>1/27/13</a:t>
             </a:fld>
             <a:endParaRPr lang="en-US"/>
           </a:p>
@@ -3235,7 +3807,7 @@
           <a:p>
             <a:fld id="{C1FF6DA9-008F-8B48-92A6-B652298478BF}" type="slidenum">
               <a:rPr lang="en-US" smtClean="0"/>
-              <a:t>‹N°›</a:t>
+              <a:t>‹#›</a:t>
             </a:fld>
             <a:endParaRPr lang="en-US"/>
           </a:p>
@@ -3296,9 +3868,10 @@
           </a:lstStyle>
           <a:p>
             <a:r>
-              <a:rPr lang="en-US"/>
+              <a:rPr lang="en-US" smtClean="0"/>
               <a:t>Click to edit Master title style</a:t>
             </a:r>
+            <a:endParaRPr lang="en-US"/>
           </a:p>
         </p:txBody>
       </p:sp>
@@ -3422,7 +3995,7 @@
           <a:p>
             <a:pPr lvl="0"/>
             <a:r>
-              <a:rPr lang="en-US"/>
+              <a:rPr lang="en-US" smtClean="0"/>
               <a:t>Click to edit Master text styles</a:t>
             </a:r>
           </a:p>
@@ -3445,7 +4018,7 @@
           <a:p>
             <a:fld id="{5BCAD085-E8A6-8845-BD4E-CB4CCA059FC4}" type="datetimeFigureOut">
               <a:rPr lang="en-US" smtClean="0"/>
-              <a:t>7/22/2026</a:t>
+              <a:t>1/27/13</a:t>
             </a:fld>
             <a:endParaRPr lang="en-US"/>
           </a:p>
@@ -3487,7 +4060,7 @@
           <a:p>
             <a:fld id="{C1FF6DA9-008F-8B48-92A6-B652298478BF}" type="slidenum">
               <a:rPr lang="en-US" smtClean="0"/>
-              <a:t>‹N°›</a:t>
+              <a:t>‹#›</a:t>
             </a:fld>
             <a:endParaRPr lang="en-US"/>
           </a:p>
@@ -3554,9 +4127,10 @@
           <a:lstStyle/>
           <a:p>
             <a:r>
-              <a:rPr lang="en-US"/>
+              <a:rPr lang="en-US" smtClean="0"/>
               <a:t>Click to edit Master title style</a:t>
             </a:r>
+            <a:endParaRPr lang="en-US"/>
           </a:p>
         </p:txBody>
       </p:sp>
@@ -3587,37 +4161,38 @@
           <a:p>
             <a:pPr lvl="0"/>
             <a:r>
-              <a:rPr lang="en-US"/>
+              <a:rPr lang="en-US" smtClean="0"/>
               <a:t>Click to edit Master text styles</a:t>
             </a:r>
           </a:p>
           <a:p>
             <a:pPr lvl="1"/>
             <a:r>
-              <a:rPr lang="en-US"/>
+              <a:rPr lang="en-US" smtClean="0"/>
               <a:t>Second level</a:t>
             </a:r>
           </a:p>
           <a:p>
             <a:pPr lvl="2"/>
             <a:r>
-              <a:rPr lang="en-US"/>
+              <a:rPr lang="en-US" smtClean="0"/>
               <a:t>Third level</a:t>
             </a:r>
           </a:p>
           <a:p>
             <a:pPr lvl="3"/>
             <a:r>
-              <a:rPr lang="en-US"/>
+              <a:rPr lang="en-US" smtClean="0"/>
               <a:t>Fourth level</a:t>
             </a:r>
           </a:p>
           <a:p>
             <a:pPr lvl="4"/>
             <a:r>
-              <a:rPr lang="en-US"/>
+              <a:rPr lang="en-US" smtClean="0"/>
               <a:t>Fifth level</a:t>
             </a:r>
+            <a:endParaRPr lang="en-US"/>
           </a:p>
         </p:txBody>
       </p:sp>
@@ -3656,7 +4231,7 @@
           <a:p>
             <a:fld id="{5BCAD085-E8A6-8845-BD4E-CB4CCA059FC4}" type="datetimeFigureOut">
               <a:rPr lang="en-US" smtClean="0"/>
-              <a:t>7/22/2026</a:t>
+              <a:t>1/27/13</a:t>
             </a:fld>
             <a:endParaRPr lang="en-US"/>
           </a:p>
@@ -3734,7 +4309,7 @@
           <a:p>
             <a:fld id="{C1FF6DA9-008F-8B48-92A6-B652298478BF}" type="slidenum">
               <a:rPr lang="en-US" smtClean="0"/>
-              <a:t>‹N°›</a:t>
+              <a:t>‹#›</a:t>
             </a:fld>
             <a:endParaRPr lang="en-US"/>
           </a:p>
@@ -4015,7 +4590,7 @@
 </file>
 
 <file path=ppt/slides/slide1.xml><?xml version="1.0" encoding="utf-8"?>
-<p:sld xmlns:a="http://schemas.openxmlformats.org/drawingml/2006/main" xmlns:r="http://schemas.openxmlformats.org/officeDocument/2006/relationships" xmlns:p="http://schemas.openxmlformats.org/presentationml/2006/main">
+<p:sld xmlns:a="http://schemas.openxmlformats.org/drawingml/2006/main" xmlns:p="http://schemas.openxmlformats.org/presentationml/2006/main" xmlns:r="http://schemas.openxmlformats.org/officeDocument/2006/relationships">
   <p:cSld>
     <p:bg>
       <p:bgPr>
@@ -4031,14 +4606,7 @@
         <p:cNvGrpSpPr/>
         <p:nvPr/>
       </p:nvGrpSpPr>
-      <p:grpSpPr>
-        <a:xfrm>
-          <a:off x="0" y="0"/>
-          <a:ext cx="0" cy="0"/>
-          <a:chOff x="0" y="0"/>
-          <a:chExt cx="0" cy="0"/>
-        </a:xfrm>
-      </p:grpSpPr>
+      <p:grpSpPr/>
       <p:sp>
         <p:nvSpPr>
           <p:cNvPr id="2" name="Rectangle 1"/>
@@ -4080,7 +4648,6 @@
           <a:lstStyle/>
           <a:p>
             <a:pPr algn="ctr"/>
-            <a:endParaRPr/>
           </a:p>
         </p:txBody>
       </p:sp>
@@ -4177,7 +4744,7 @@
         <p:spPr>
           <a:xfrm>
             <a:off x="914400" y="2971800"/>
-            <a:ext cx="10332720" cy="902811"/>
+            <a:ext cx="10332720" cy="1280160"/>
           </a:xfrm>
           <a:prstGeom prst="rect">
             <a:avLst/>
@@ -4199,22 +4766,13 @@
               </a:spcAft>
             </a:pPr>
             <a:r>
-              <a:rPr sz="2800" b="1" dirty="0" err="1">
+              <a:rPr sz="2800" b="1">
                 <a:solidFill>
                   <a:srgbClr val="FFFFFF"/>
                 </a:solidFill>
                 <a:latin typeface="Calibri"/>
               </a:rPr>
-              <a:t>Présentation</a:t>
-            </a:r>
-            <a:r>
-              <a:rPr sz="2800" b="1" dirty="0">
-                <a:solidFill>
-                  <a:srgbClr val="FFFFFF"/>
-                </a:solidFill>
-                <a:latin typeface="Calibri"/>
-              </a:rPr>
-              <a:t> du Sprint 2</a:t>
+              <a:t>Présentation du Sprint 2</a:t>
             </a:r>
           </a:p>
           <a:p>
@@ -4227,128 +4785,14 @@
               </a:spcAft>
             </a:pPr>
             <a:r>
-              <a:rPr sz="1800" b="0" dirty="0">
+              <a:rPr sz="1800" b="0">
                 <a:solidFill>
                   <a:srgbClr val="9FC8F5"/>
                 </a:solidFill>
                 <a:latin typeface="Calibri"/>
               </a:rPr>
-              <a:t>Revue de r</a:t>
-            </a:r>
-            <a:r>
-              <a:rPr lang="fr-FR" sz="1800" b="0" dirty="0" err="1">
-                <a:solidFill>
-                  <a:srgbClr val="9FC8F5"/>
-                </a:solidFill>
-                <a:latin typeface="Calibri"/>
-              </a:rPr>
-              <a:t>ealiz</a:t>
-            </a:r>
-            <a:r>
-              <a:rPr sz="1800" b="0" dirty="0" err="1">
-                <a:solidFill>
-                  <a:srgbClr val="9FC8F5"/>
-                </a:solidFill>
-                <a:latin typeface="Calibri"/>
-              </a:rPr>
-              <a:t>ation</a:t>
-            </a:r>
-            <a:r>
-              <a:rPr lang="en-US" dirty="0">
-                <a:solidFill>
-                  <a:srgbClr val="9FC8F5"/>
-                </a:solidFill>
-                <a:latin typeface="Calibri"/>
-              </a:rPr>
-              <a:t>, </a:t>
-            </a:r>
-            <a:r>
-              <a:rPr sz="1800" b="0" dirty="0" err="1">
-                <a:solidFill>
-                  <a:srgbClr val="9FC8F5"/>
-                </a:solidFill>
-                <a:latin typeface="Calibri"/>
-              </a:rPr>
-              <a:t>ce</a:t>
-            </a:r>
-            <a:r>
-              <a:rPr sz="1800" b="0" dirty="0">
-                <a:solidFill>
-                  <a:srgbClr val="9FC8F5"/>
-                </a:solidFill>
-                <a:latin typeface="Calibri"/>
-              </a:rPr>
-              <a:t> qui a </a:t>
-            </a:r>
-            <a:r>
-              <a:rPr sz="1800" b="0" dirty="0" err="1">
-                <a:solidFill>
-                  <a:srgbClr val="9FC8F5"/>
-                </a:solidFill>
-                <a:latin typeface="Calibri"/>
-              </a:rPr>
-              <a:t>été</a:t>
-            </a:r>
-            <a:r>
-              <a:rPr sz="1800" b="0" dirty="0">
-                <a:solidFill>
-                  <a:srgbClr val="9FC8F5"/>
-                </a:solidFill>
-                <a:latin typeface="Calibri"/>
-              </a:rPr>
-              <a:t> </a:t>
-            </a:r>
-            <a:r>
-              <a:rPr sz="1800" b="0" dirty="0" err="1">
-                <a:solidFill>
-                  <a:srgbClr val="9FC8F5"/>
-                </a:solidFill>
-                <a:latin typeface="Calibri"/>
-              </a:rPr>
-              <a:t>développé</a:t>
-            </a:r>
-            <a:r>
-              <a:rPr sz="1800" b="0" dirty="0">
-                <a:solidFill>
-                  <a:srgbClr val="9FC8F5"/>
-                </a:solidFill>
-                <a:latin typeface="Calibri"/>
-              </a:rPr>
-              <a:t>, </a:t>
-            </a:r>
-            <a:r>
-              <a:rPr sz="1800" b="0" dirty="0" err="1">
-                <a:solidFill>
-                  <a:srgbClr val="9FC8F5"/>
-                </a:solidFill>
-                <a:latin typeface="Calibri"/>
-              </a:rPr>
-              <a:t>testé</a:t>
-            </a:r>
-            <a:r>
-              <a:rPr sz="1800" b="0" dirty="0">
-                <a:solidFill>
-                  <a:srgbClr val="9FC8F5"/>
-                </a:solidFill>
-                <a:latin typeface="Calibri"/>
-              </a:rPr>
-              <a:t> et </a:t>
-            </a:r>
-            <a:r>
-              <a:rPr sz="1800" b="0" dirty="0" err="1">
-                <a:solidFill>
-                  <a:srgbClr val="9FC8F5"/>
-                </a:solidFill>
-                <a:latin typeface="Calibri"/>
-              </a:rPr>
-              <a:t>intégré</a:t>
-            </a:r>
-            <a:endParaRPr sz="1800" b="0" dirty="0">
-              <a:solidFill>
-                <a:srgbClr val="9FC8F5"/>
-              </a:solidFill>
-              <a:latin typeface="Calibri"/>
-            </a:endParaRPr>
+              <a:t>Revue de réalisation — ce qui a été développé, testé et intégré</a:t>
+            </a:r>
           </a:p>
         </p:txBody>
       </p:sp>
@@ -4361,7 +4805,7 @@
         <p:spPr>
           <a:xfrm>
             <a:off x="914400" y="4846320"/>
-            <a:ext cx="10332720" cy="636072"/>
+            <a:ext cx="10332720" cy="1371600"/>
           </a:xfrm>
           <a:prstGeom prst="rect">
             <a:avLst/>
@@ -4383,31 +4827,13 @@
               </a:spcAft>
             </a:pPr>
             <a:r>
-              <a:rPr sz="1800" b="0" dirty="0">
+              <a:rPr sz="1800" b="0">
                 <a:solidFill>
                   <a:srgbClr val="FFFFFF"/>
                 </a:solidFill>
                 <a:latin typeface="Calibri"/>
               </a:rPr>
-              <a:t>Équipe : Souleymane DIALLO  ·  Zakaria </a:t>
-            </a:r>
-            <a:r>
-              <a:rPr sz="1800" b="0" dirty="0" err="1">
-                <a:solidFill>
-                  <a:srgbClr val="FFFFFF"/>
-                </a:solidFill>
-                <a:latin typeface="Calibri"/>
-              </a:rPr>
-              <a:t>Lahouiri</a:t>
-            </a:r>
-            <a:r>
-              <a:rPr sz="1800" b="0" dirty="0">
-                <a:solidFill>
-                  <a:srgbClr val="FFFFFF"/>
-                </a:solidFill>
-                <a:latin typeface="Calibri"/>
-              </a:rPr>
-              <a:t>  ·  Larbi Saib</a:t>
+              <a:t>Équipe : Souleymane DIALLO  ·  Zakaria Lahouiri  ·  Larbi Saib</a:t>
             </a:r>
           </a:p>
           <a:p>
@@ -4420,76 +4846,32 @@
               </a:spcAft>
             </a:pPr>
             <a:r>
-              <a:rPr sz="1400" b="0" dirty="0" err="1">
+              <a:rPr sz="1400" b="0">
                 <a:solidFill>
                   <a:srgbClr val="9FC8F5"/>
                 </a:solidFill>
                 <a:latin typeface="Calibri"/>
               </a:rPr>
-              <a:t>Projet</a:t>
-            </a:r>
-            <a:r>
-              <a:rPr sz="1400" b="0" dirty="0">
-                <a:solidFill>
-                  <a:srgbClr val="9FC8F5"/>
-                </a:solidFill>
-                <a:latin typeface="Calibri"/>
-              </a:rPr>
-              <a:t> </a:t>
-            </a:r>
-            <a:r>
-              <a:rPr sz="1400" b="0" dirty="0" err="1">
-                <a:solidFill>
-                  <a:srgbClr val="9FC8F5"/>
-                </a:solidFill>
-                <a:latin typeface="Calibri"/>
-              </a:rPr>
-              <a:t>intégrateur</a:t>
-            </a:r>
-            <a:r>
-              <a:rPr lang="en-US" sz="1400" dirty="0">
-                <a:solidFill>
-                  <a:srgbClr val="9FC8F5"/>
-                </a:solidFill>
-                <a:latin typeface="Calibri"/>
-              </a:rPr>
-              <a:t> : </a:t>
-            </a:r>
-            <a:r>
-              <a:rPr sz="1400" b="0" dirty="0" err="1">
-                <a:solidFill>
-                  <a:srgbClr val="9FC8F5"/>
-                </a:solidFill>
-                <a:latin typeface="Calibri"/>
-              </a:rPr>
-              <a:t>Programmation</a:t>
-            </a:r>
-            <a:r>
-              <a:rPr sz="1400" b="0" dirty="0">
-                <a:solidFill>
-                  <a:srgbClr val="9FC8F5"/>
-                </a:solidFill>
-                <a:latin typeface="Calibri"/>
-              </a:rPr>
-              <a:t> </a:t>
-            </a:r>
-            <a:r>
-              <a:rPr sz="1400" b="0" dirty="0" err="1">
-                <a:solidFill>
-                  <a:srgbClr val="9FC8F5"/>
-                </a:solidFill>
-                <a:latin typeface="Calibri"/>
-              </a:rPr>
-              <a:t>informatique</a:t>
-            </a:r>
-            <a:r>
-              <a:rPr sz="1400" b="0" dirty="0">
-                <a:solidFill>
-                  <a:srgbClr val="9FC8F5"/>
-                </a:solidFill>
-                <a:latin typeface="Calibri"/>
-              </a:rPr>
-              <a:t>  ·  Collège La Cité  ·  Printemps 2026</a:t>
+              <a:t>Projet intégrateur — Programmation informatique  ·  Collège La Cité  ·  Printemps 2026</a:t>
+            </a:r>
+          </a:p>
+          <a:p>
+            <a:pPr algn="ctr">
+              <a:spcBef>
+                <a:spcPts val="0"/>
+              </a:spcBef>
+              <a:spcAft>
+                <a:spcPts val="600"/>
+              </a:spcAft>
+            </a:pPr>
+            <a:r>
+              <a:rPr sz="1300" b="0">
+                <a:solidFill>
+                  <a:srgbClr val="CFE3FF"/>
+                </a:solidFill>
+                <a:latin typeface="Calibri"/>
+              </a:rPr>
+              <a:t>Présentation des 29–30 juillet 2026</a:t>
             </a:r>
           </a:p>
         </p:txBody>
@@ -4503,7 +4885,7 @@
 </file>
 
 <file path=ppt/slides/slide10.xml><?xml version="1.0" encoding="utf-8"?>
-<p:sld xmlns:a="http://schemas.openxmlformats.org/drawingml/2006/main" xmlns:r="http://schemas.openxmlformats.org/officeDocument/2006/relationships" xmlns:p="http://schemas.openxmlformats.org/presentationml/2006/main">
+<p:sld xmlns:a="http://schemas.openxmlformats.org/drawingml/2006/main" xmlns:p="http://schemas.openxmlformats.org/presentationml/2006/main" xmlns:r="http://schemas.openxmlformats.org/officeDocument/2006/relationships">
   <p:cSld>
     <p:bg>
       <p:bgPr>
@@ -4519,14 +4901,7 @@
         <p:cNvGrpSpPr/>
         <p:nvPr/>
       </p:nvGrpSpPr>
-      <p:grpSpPr>
-        <a:xfrm>
-          <a:off x="0" y="0"/>
-          <a:ext cx="0" cy="0"/>
-          <a:chOff x="0" y="0"/>
-          <a:chExt cx="0" cy="0"/>
-        </a:xfrm>
-      </p:grpSpPr>
+      <p:grpSpPr/>
       <p:sp>
         <p:nvSpPr>
           <p:cNvPr id="2" name="Rectangle 1"/>
@@ -4568,7 +4943,6 @@
           <a:lstStyle/>
           <a:p>
             <a:pPr algn="ctr"/>
-            <a:endParaRPr/>
           </a:p>
         </p:txBody>
       </p:sp>
@@ -4613,7 +4987,6 @@
           <a:lstStyle/>
           <a:p>
             <a:pPr algn="ctr"/>
-            <a:endParaRPr/>
           </a:p>
         </p:txBody>
       </p:sp>
@@ -4654,7 +5027,7 @@
           </a:fontRef>
         </p:style>
         <p:txBody>
-          <a:bodyPr wrap="none" rtlCol="0" anchor="ctr"/>
+          <a:bodyPr rtlCol="0" anchor="ctr" wrap="none"/>
           <a:lstStyle/>
           <a:p>
             <a:pPr algn="ctr"/>
@@ -4771,7 +5144,6 @@
           <a:lstStyle/>
           <a:p>
             <a:pPr algn="ctr"/>
-            <a:endParaRPr/>
           </a:p>
         </p:txBody>
       </p:sp>
@@ -4816,7 +5188,6 @@
           <a:lstStyle/>
           <a:p>
             <a:pPr algn="ctr"/>
-            <a:endParaRPr/>
           </a:p>
         </p:txBody>
       </p:sp>
@@ -4914,7 +5285,7 @@
                 </a:solidFill>
                 <a:latin typeface="Calibri"/>
               </a:rPr>
-              <a:t>•  Statistiques et tableau de bord réels (26)</a:t>
+              <a:t>•  Statistiques complètes du tableau de bord (26)</a:t>
             </a:r>
           </a:p>
           <a:p>
@@ -5017,7 +5388,6 @@
           <a:lstStyle/>
           <a:p>
             <a:pPr algn="ctr"/>
-            <a:endParaRPr/>
           </a:p>
         </p:txBody>
       </p:sp>
@@ -5062,7 +5432,6 @@
           <a:lstStyle/>
           <a:p>
             <a:pPr algn="ctr"/>
-            <a:endParaRPr/>
           </a:p>
         </p:txBody>
       </p:sp>
@@ -5282,7 +5651,6 @@
           <a:lstStyle/>
           <a:p>
             <a:pPr algn="ctr"/>
-            <a:endParaRPr/>
           </a:p>
         </p:txBody>
       </p:sp>
@@ -5327,7 +5695,6 @@
           <a:lstStyle/>
           <a:p>
             <a:pPr algn="ctr"/>
-            <a:endParaRPr/>
           </a:p>
         </p:txBody>
       </p:sp>
@@ -5488,7 +5855,7 @@
 </file>
 
 <file path=ppt/slides/slide11.xml><?xml version="1.0" encoding="utf-8"?>
-<p:sld xmlns:a="http://schemas.openxmlformats.org/drawingml/2006/main" xmlns:r="http://schemas.openxmlformats.org/officeDocument/2006/relationships" xmlns:p="http://schemas.openxmlformats.org/presentationml/2006/main">
+<p:sld xmlns:a="http://schemas.openxmlformats.org/drawingml/2006/main" xmlns:p="http://schemas.openxmlformats.org/presentationml/2006/main" xmlns:r="http://schemas.openxmlformats.org/officeDocument/2006/relationships">
   <p:cSld>
     <p:bg>
       <p:bgPr>
@@ -5504,14 +5871,7 @@
         <p:cNvGrpSpPr/>
         <p:nvPr/>
       </p:nvGrpSpPr>
-      <p:grpSpPr>
-        <a:xfrm>
-          <a:off x="0" y="0"/>
-          <a:ext cx="0" cy="0"/>
-          <a:chOff x="0" y="0"/>
-          <a:chExt cx="0" cy="0"/>
-        </a:xfrm>
-      </p:grpSpPr>
+      <p:grpSpPr/>
       <p:sp>
         <p:nvSpPr>
           <p:cNvPr id="2" name="Rectangle 1"/>
@@ -5553,7 +5913,6 @@
           <a:lstStyle/>
           <a:p>
             <a:pPr algn="ctr"/>
-            <a:endParaRPr/>
           </a:p>
         </p:txBody>
       </p:sp>
@@ -5669,7 +6028,7 @@
 </file>
 
 <file path=ppt/slides/slide2.xml><?xml version="1.0" encoding="utf-8"?>
-<p:sld xmlns:a="http://schemas.openxmlformats.org/drawingml/2006/main" xmlns:r="http://schemas.openxmlformats.org/officeDocument/2006/relationships" xmlns:p="http://schemas.openxmlformats.org/presentationml/2006/main">
+<p:sld xmlns:a="http://schemas.openxmlformats.org/drawingml/2006/main" xmlns:p="http://schemas.openxmlformats.org/presentationml/2006/main" xmlns:r="http://schemas.openxmlformats.org/officeDocument/2006/relationships">
   <p:cSld>
     <p:bg>
       <p:bgPr>
@@ -5685,14 +6044,7 @@
         <p:cNvGrpSpPr/>
         <p:nvPr/>
       </p:nvGrpSpPr>
-      <p:grpSpPr>
-        <a:xfrm>
-          <a:off x="0" y="0"/>
-          <a:ext cx="0" cy="0"/>
-          <a:chOff x="0" y="0"/>
-          <a:chExt cx="0" cy="0"/>
-        </a:xfrm>
-      </p:grpSpPr>
+      <p:grpSpPr/>
       <p:sp>
         <p:nvSpPr>
           <p:cNvPr id="2" name="Rectangle 1"/>
@@ -5734,7 +6086,6 @@
           <a:lstStyle/>
           <a:p>
             <a:pPr algn="ctr"/>
-            <a:endParaRPr/>
           </a:p>
         </p:txBody>
       </p:sp>
@@ -5779,7 +6130,6 @@
           <a:lstStyle/>
           <a:p>
             <a:pPr algn="ctr"/>
-            <a:endParaRPr/>
           </a:p>
         </p:txBody>
       </p:sp>
@@ -5820,7 +6170,7 @@
           </a:fontRef>
         </p:style>
         <p:txBody>
-          <a:bodyPr wrap="none" rtlCol="0" anchor="ctr"/>
+          <a:bodyPr rtlCol="0" anchor="ctr" wrap="none"/>
           <a:lstStyle/>
           <a:p>
             <a:pPr algn="ctr"/>
@@ -5937,7 +6287,6 @@
           <a:lstStyle/>
           <a:p>
             <a:pPr algn="ctr"/>
-            <a:endParaRPr/>
           </a:p>
         </p:txBody>
       </p:sp>
@@ -5982,7 +6331,6 @@
           <a:lstStyle/>
           <a:p>
             <a:pPr algn="ctr"/>
-            <a:endParaRPr/>
           </a:p>
         </p:txBody>
       </p:sp>
@@ -6145,7 +6493,6 @@
           <a:lstStyle/>
           <a:p>
             <a:pPr algn="ctr"/>
-            <a:endParaRPr/>
           </a:p>
         </p:txBody>
       </p:sp>
@@ -6190,7 +6537,6 @@
           <a:lstStyle/>
           <a:p>
             <a:pPr algn="ctr"/>
-            <a:endParaRPr/>
           </a:p>
         </p:txBody>
       </p:sp>
@@ -6225,371 +6571,89 @@
               </a:spcAft>
             </a:pPr>
             <a:r>
-              <a:rPr sz="1600" b="1" dirty="0">
+              <a:rPr sz="1600" b="1">
                 <a:solidFill>
                   <a:srgbClr val="00897B"/>
                 </a:solidFill>
                 <a:latin typeface="Calibri"/>
               </a:rPr>
-              <a:t>Solution </a:t>
-            </a:r>
-            <a:r>
-              <a:rPr sz="1600" b="1" dirty="0" err="1">
-                <a:solidFill>
-                  <a:srgbClr val="00897B"/>
-                </a:solidFill>
-                <a:latin typeface="Calibri"/>
-              </a:rPr>
-              <a:t>proposée</a:t>
-            </a:r>
-            <a:endParaRPr sz="1600" b="1" dirty="0">
-              <a:solidFill>
-                <a:srgbClr val="00897B"/>
-              </a:solidFill>
-              <a:latin typeface="Calibri"/>
-            </a:endParaRPr>
-          </a:p>
-          <a:p>
-            <a:pPr algn="l">
-              <a:spcBef>
-                <a:spcPts val="0"/>
-              </a:spcBef>
-              <a:spcAft>
-                <a:spcPts val="300"/>
-              </a:spcAft>
-            </a:pPr>
-            <a:r>
-              <a:rPr sz="1300" b="0" dirty="0">
-                <a:solidFill>
-                  <a:srgbClr val="404040"/>
-                </a:solidFill>
-                <a:latin typeface="Calibri"/>
-              </a:rPr>
-              <a:t>•  Application web : la </a:t>
-            </a:r>
-            <a:r>
-              <a:rPr sz="1300" b="0" dirty="0" err="1">
-                <a:solidFill>
-                  <a:srgbClr val="404040"/>
-                </a:solidFill>
-                <a:latin typeface="Calibri"/>
-              </a:rPr>
-              <a:t>réception</a:t>
-            </a:r>
-            <a:r>
-              <a:rPr sz="1300" b="0" dirty="0">
-                <a:solidFill>
-                  <a:srgbClr val="404040"/>
-                </a:solidFill>
-                <a:latin typeface="Calibri"/>
-              </a:rPr>
-              <a:t> </a:t>
-            </a:r>
-            <a:r>
-              <a:rPr sz="1300" b="0" dirty="0" err="1">
-                <a:solidFill>
-                  <a:srgbClr val="404040"/>
-                </a:solidFill>
-                <a:latin typeface="Calibri"/>
-              </a:rPr>
-              <a:t>gère</a:t>
-            </a:r>
-            <a:r>
-              <a:rPr sz="1300" b="0" dirty="0">
-                <a:solidFill>
-                  <a:srgbClr val="404040"/>
-                </a:solidFill>
-                <a:latin typeface="Calibri"/>
-              </a:rPr>
-              <a:t> les </a:t>
-            </a:r>
-            <a:r>
-              <a:rPr sz="1300" b="0" dirty="0" err="1">
-                <a:solidFill>
-                  <a:srgbClr val="404040"/>
-                </a:solidFill>
-                <a:latin typeface="Calibri"/>
-              </a:rPr>
-              <a:t>rendez</a:t>
-            </a:r>
-            <a:r>
-              <a:rPr sz="1300" b="0" dirty="0">
-                <a:solidFill>
-                  <a:srgbClr val="404040"/>
-                </a:solidFill>
-                <a:latin typeface="Calibri"/>
-              </a:rPr>
-              <a:t>-vous à la place</a:t>
-            </a:r>
-          </a:p>
-          <a:p>
-            <a:pPr algn="l">
-              <a:spcBef>
-                <a:spcPts val="0"/>
-              </a:spcBef>
-              <a:spcAft>
-                <a:spcPts val="300"/>
-              </a:spcAft>
-            </a:pPr>
-            <a:r>
-              <a:rPr sz="1300" b="0" dirty="0">
-                <a:solidFill>
-                  <a:srgbClr val="404040"/>
-                </a:solidFill>
-                <a:latin typeface="Calibri"/>
-              </a:rPr>
-              <a:t>•     des patients (qui </a:t>
-            </a:r>
-            <a:r>
-              <a:rPr sz="1300" b="0" dirty="0" err="1">
-                <a:solidFill>
-                  <a:srgbClr val="404040"/>
-                </a:solidFill>
-                <a:latin typeface="Calibri"/>
-              </a:rPr>
-              <a:t>appellent</a:t>
-            </a:r>
-            <a:r>
-              <a:rPr sz="1300" b="0" dirty="0">
-                <a:solidFill>
-                  <a:srgbClr val="404040"/>
-                </a:solidFill>
-                <a:latin typeface="Calibri"/>
-              </a:rPr>
-              <a:t> au </a:t>
-            </a:r>
-            <a:r>
-              <a:rPr sz="1300" b="0" dirty="0" err="1">
-                <a:solidFill>
-                  <a:srgbClr val="404040"/>
-                </a:solidFill>
-                <a:latin typeface="Calibri"/>
-              </a:rPr>
-              <a:t>téléphone</a:t>
-            </a:r>
-            <a:r>
-              <a:rPr sz="1300" b="0" dirty="0">
-                <a:solidFill>
-                  <a:srgbClr val="404040"/>
-                </a:solidFill>
-                <a:latin typeface="Calibri"/>
-              </a:rPr>
-              <a:t>)</a:t>
-            </a:r>
-          </a:p>
-          <a:p>
-            <a:pPr algn="l">
-              <a:spcBef>
-                <a:spcPts val="0"/>
-              </a:spcBef>
-              <a:spcAft>
-                <a:spcPts val="300"/>
-              </a:spcAft>
-            </a:pPr>
-            <a:r>
-              <a:rPr sz="1300" b="0" dirty="0">
-                <a:solidFill>
-                  <a:srgbClr val="404040"/>
-                </a:solidFill>
-                <a:latin typeface="Calibri"/>
-              </a:rPr>
-              <a:t>•  </a:t>
-            </a:r>
-            <a:r>
-              <a:rPr sz="1300" b="0" dirty="0" err="1">
-                <a:solidFill>
-                  <a:srgbClr val="404040"/>
-                </a:solidFill>
-                <a:latin typeface="Calibri"/>
-              </a:rPr>
-              <a:t>Disponibilités</a:t>
-            </a:r>
-            <a:r>
-              <a:rPr sz="1300" b="0" dirty="0">
-                <a:solidFill>
-                  <a:srgbClr val="404040"/>
-                </a:solidFill>
-                <a:latin typeface="Calibri"/>
-              </a:rPr>
-              <a:t> des </a:t>
-            </a:r>
-            <a:r>
-              <a:rPr sz="1300" b="0" dirty="0" err="1">
-                <a:solidFill>
-                  <a:srgbClr val="404040"/>
-                </a:solidFill>
-                <a:latin typeface="Calibri"/>
-              </a:rPr>
-              <a:t>médecins</a:t>
-            </a:r>
-            <a:r>
-              <a:rPr sz="1300" b="0" dirty="0">
-                <a:solidFill>
-                  <a:srgbClr val="404040"/>
-                </a:solidFill>
-                <a:latin typeface="Calibri"/>
-              </a:rPr>
-              <a:t> → </a:t>
-            </a:r>
-            <a:r>
-              <a:rPr sz="1300" b="0" dirty="0" err="1">
-                <a:solidFill>
-                  <a:srgbClr val="404040"/>
-                </a:solidFill>
-                <a:latin typeface="Calibri"/>
-              </a:rPr>
-              <a:t>créneaux</a:t>
-            </a:r>
-            <a:r>
-              <a:rPr sz="1300" b="0" dirty="0">
-                <a:solidFill>
-                  <a:srgbClr val="404040"/>
-                </a:solidFill>
-                <a:latin typeface="Calibri"/>
-              </a:rPr>
-              <a:t> </a:t>
-            </a:r>
-            <a:r>
-              <a:rPr sz="1300" b="0" dirty="0" err="1">
-                <a:solidFill>
-                  <a:srgbClr val="404040"/>
-                </a:solidFill>
-                <a:latin typeface="Calibri"/>
-              </a:rPr>
-              <a:t>réservables</a:t>
-            </a:r>
-            <a:r>
-              <a:rPr sz="1300" b="0" dirty="0">
-                <a:solidFill>
-                  <a:srgbClr val="404040"/>
-                </a:solidFill>
-                <a:latin typeface="Calibri"/>
-              </a:rPr>
-              <a:t> </a:t>
-            </a:r>
-            <a:r>
-              <a:rPr sz="1300" b="0" dirty="0" err="1">
-                <a:solidFill>
-                  <a:srgbClr val="404040"/>
-                </a:solidFill>
-                <a:latin typeface="Calibri"/>
-              </a:rPr>
-              <a:t>générés</a:t>
-            </a:r>
-            <a:endParaRPr sz="1300" b="0" dirty="0">
-              <a:solidFill>
-                <a:srgbClr val="404040"/>
-              </a:solidFill>
-              <a:latin typeface="Calibri"/>
-            </a:endParaRPr>
-          </a:p>
-          <a:p>
-            <a:pPr algn="l">
-              <a:spcBef>
-                <a:spcPts val="0"/>
-              </a:spcBef>
-              <a:spcAft>
-                <a:spcPts val="300"/>
-              </a:spcAft>
-            </a:pPr>
-            <a:r>
-              <a:rPr sz="1300" b="0" dirty="0">
-                <a:solidFill>
-                  <a:srgbClr val="404040"/>
-                </a:solidFill>
-                <a:latin typeface="Calibri"/>
-              </a:rPr>
-              <a:t>•  Flux du jour </a:t>
-            </a:r>
-            <a:r>
-              <a:rPr sz="1300" b="0" dirty="0" err="1">
-                <a:solidFill>
-                  <a:srgbClr val="404040"/>
-                </a:solidFill>
-                <a:latin typeface="Calibri"/>
-              </a:rPr>
-              <a:t>en</a:t>
-            </a:r>
-            <a:r>
-              <a:rPr sz="1300" b="0" dirty="0">
-                <a:solidFill>
-                  <a:srgbClr val="404040"/>
-                </a:solidFill>
-                <a:latin typeface="Calibri"/>
-              </a:rPr>
-              <a:t> temps </a:t>
-            </a:r>
-            <a:r>
-              <a:rPr sz="1300" b="0" dirty="0" err="1">
-                <a:solidFill>
-                  <a:srgbClr val="404040"/>
-                </a:solidFill>
-                <a:latin typeface="Calibri"/>
-              </a:rPr>
-              <a:t>réel</a:t>
-            </a:r>
-            <a:r>
-              <a:rPr sz="1300" b="0" dirty="0">
-                <a:solidFill>
-                  <a:srgbClr val="404040"/>
-                </a:solidFill>
-                <a:latin typeface="Calibri"/>
-              </a:rPr>
-              <a:t> + </a:t>
-            </a:r>
-            <a:r>
-              <a:rPr sz="1300" b="0" dirty="0" err="1">
-                <a:solidFill>
-                  <a:srgbClr val="404040"/>
-                </a:solidFill>
-                <a:latin typeface="Calibri"/>
-              </a:rPr>
-              <a:t>contrôle</a:t>
-            </a:r>
-            <a:r>
-              <a:rPr sz="1300" b="0" dirty="0">
-                <a:solidFill>
-                  <a:srgbClr val="404040"/>
-                </a:solidFill>
-                <a:latin typeface="Calibri"/>
-              </a:rPr>
-              <a:t> </a:t>
-            </a:r>
-            <a:r>
-              <a:rPr sz="1300" b="0" dirty="0" err="1">
-                <a:solidFill>
-                  <a:srgbClr val="404040"/>
-                </a:solidFill>
-                <a:latin typeface="Calibri"/>
-              </a:rPr>
-              <a:t>d'accès</a:t>
-            </a:r>
-            <a:r>
-              <a:rPr sz="1300" b="0" dirty="0">
-                <a:solidFill>
-                  <a:srgbClr val="404040"/>
-                </a:solidFill>
-                <a:latin typeface="Calibri"/>
-              </a:rPr>
-              <a:t> par </a:t>
-            </a:r>
-            <a:r>
-              <a:rPr sz="1300" b="0" dirty="0" err="1">
-                <a:solidFill>
-                  <a:srgbClr val="404040"/>
-                </a:solidFill>
-                <a:latin typeface="Calibri"/>
-              </a:rPr>
-              <a:t>rôle</a:t>
-            </a:r>
-            <a:r>
-              <a:rPr sz="1300" b="0" dirty="0">
-                <a:solidFill>
-                  <a:srgbClr val="404040"/>
-                </a:solidFill>
-                <a:latin typeface="Calibri"/>
-              </a:rPr>
-              <a:t> (RBAC)</a:t>
+              <a:t>Solution proposée</a:t>
+            </a:r>
+          </a:p>
+          <a:p>
+            <a:pPr algn="l">
+              <a:spcBef>
+                <a:spcPts val="0"/>
+              </a:spcBef>
+              <a:spcAft>
+                <a:spcPts val="300"/>
+              </a:spcAft>
+            </a:pPr>
+            <a:r>
+              <a:rPr sz="1300" b="0">
+                <a:solidFill>
+                  <a:srgbClr val="404040"/>
+                </a:solidFill>
+                <a:latin typeface="Calibri"/>
+              </a:rPr>
+              <a:t>•  Application web : la réception gère les rendez-vous à la place</a:t>
+            </a:r>
+          </a:p>
+          <a:p>
+            <a:pPr algn="l">
+              <a:spcBef>
+                <a:spcPts val="0"/>
+              </a:spcBef>
+              <a:spcAft>
+                <a:spcPts val="300"/>
+              </a:spcAft>
+            </a:pPr>
+            <a:r>
+              <a:rPr sz="1300" b="0">
+                <a:solidFill>
+                  <a:srgbClr val="404040"/>
+                </a:solidFill>
+                <a:latin typeface="Calibri"/>
+              </a:rPr>
+              <a:t>•     des patients (qui appellent au téléphone)</a:t>
+            </a:r>
+          </a:p>
+          <a:p>
+            <a:pPr algn="l">
+              <a:spcBef>
+                <a:spcPts val="0"/>
+              </a:spcBef>
+              <a:spcAft>
+                <a:spcPts val="300"/>
+              </a:spcAft>
+            </a:pPr>
+            <a:r>
+              <a:rPr sz="1300" b="0">
+                <a:solidFill>
+                  <a:srgbClr val="404040"/>
+                </a:solidFill>
+                <a:latin typeface="Calibri"/>
+              </a:rPr>
+              <a:t>•  Disponibilités des médecins → créneaux réservables générés</a:t>
+            </a:r>
+          </a:p>
+          <a:p>
+            <a:pPr algn="l">
+              <a:spcBef>
+                <a:spcPts val="0"/>
+              </a:spcBef>
+              <a:spcAft>
+                <a:spcPts val="300"/>
+              </a:spcAft>
+            </a:pPr>
+            <a:r>
+              <a:rPr sz="1300" b="0">
+                <a:solidFill>
+                  <a:srgbClr val="404040"/>
+                </a:solidFill>
+                <a:latin typeface="Calibri"/>
+              </a:rPr>
+              <a:t>•  Flux du jour en temps réel + contrôle d'accès par rôle (RBAC)</a:t>
             </a:r>
           </a:p>
         </p:txBody>
@@ -6635,7 +6699,6 @@
           <a:lstStyle/>
           <a:p>
             <a:pPr algn="ctr"/>
-            <a:endParaRPr/>
           </a:p>
         </p:txBody>
       </p:sp>
@@ -6680,7 +6743,6 @@
           <a:lstStyle/>
           <a:p>
             <a:pPr algn="ctr"/>
-            <a:endParaRPr/>
           </a:p>
         </p:txBody>
       </p:sp>
@@ -6917,7 +6979,7 @@
 </file>
 
 <file path=ppt/slides/slide3.xml><?xml version="1.0" encoding="utf-8"?>
-<p:sld xmlns:a="http://schemas.openxmlformats.org/drawingml/2006/main" xmlns:r="http://schemas.openxmlformats.org/officeDocument/2006/relationships" xmlns:p="http://schemas.openxmlformats.org/presentationml/2006/main">
+<p:sld xmlns:a="http://schemas.openxmlformats.org/drawingml/2006/main" xmlns:p="http://schemas.openxmlformats.org/presentationml/2006/main" xmlns:r="http://schemas.openxmlformats.org/officeDocument/2006/relationships">
   <p:cSld>
     <p:bg>
       <p:bgPr>
@@ -6933,14 +6995,7 @@
         <p:cNvGrpSpPr/>
         <p:nvPr/>
       </p:nvGrpSpPr>
-      <p:grpSpPr>
-        <a:xfrm>
-          <a:off x="0" y="0"/>
-          <a:ext cx="0" cy="0"/>
-          <a:chOff x="0" y="0"/>
-          <a:chExt cx="0" cy="0"/>
-        </a:xfrm>
-      </p:grpSpPr>
+      <p:grpSpPr/>
       <p:sp>
         <p:nvSpPr>
           <p:cNvPr id="2" name="Rectangle 1"/>
@@ -6982,7 +7037,6 @@
           <a:lstStyle/>
           <a:p>
             <a:pPr algn="ctr"/>
-            <a:endParaRPr/>
           </a:p>
         </p:txBody>
       </p:sp>
@@ -7027,7 +7081,6 @@
           <a:lstStyle/>
           <a:p>
             <a:pPr algn="ctr"/>
-            <a:endParaRPr/>
           </a:p>
         </p:txBody>
       </p:sp>
@@ -7068,7 +7121,7 @@
           </a:fontRef>
         </p:style>
         <p:txBody>
-          <a:bodyPr wrap="none" rtlCol="0" anchor="ctr"/>
+          <a:bodyPr rtlCol="0" anchor="ctr" wrap="none"/>
           <a:lstStyle/>
           <a:p>
             <a:pPr algn="ctr"/>
@@ -7185,7 +7238,6 @@
           <a:lstStyle/>
           <a:p>
             <a:pPr algn="ctr"/>
-            <a:endParaRPr/>
           </a:p>
         </p:txBody>
       </p:sp>
@@ -7220,7 +7272,7 @@
               </a:spcAft>
             </a:pPr>
             <a:r>
-              <a:rPr sz="1200" b="1" dirty="0">
+              <a:rPr sz="1200" b="1">
                 <a:solidFill>
                   <a:srgbClr val="CFE3FF"/>
                 </a:solidFill>
@@ -7239,193 +7291,13 @@
               </a:spcAft>
             </a:pPr>
             <a:r>
-              <a:rPr sz="1600" b="1" dirty="0">
+              <a:rPr sz="1600" b="1">
                 <a:solidFill>
                   <a:srgbClr val="FFFFFF"/>
                 </a:solidFill>
                 <a:latin typeface="Calibri"/>
               </a:rPr>
-              <a:t>Une </a:t>
-            </a:r>
-            <a:r>
-              <a:rPr sz="1600" b="1" dirty="0" err="1">
-                <a:solidFill>
-                  <a:srgbClr val="FFFFFF"/>
-                </a:solidFill>
-                <a:latin typeface="Calibri"/>
-              </a:rPr>
-              <a:t>réception</a:t>
-            </a:r>
-            <a:r>
-              <a:rPr sz="1600" b="1" dirty="0">
-                <a:solidFill>
-                  <a:srgbClr val="FFFFFF"/>
-                </a:solidFill>
-                <a:latin typeface="Calibri"/>
-              </a:rPr>
-              <a:t> se </a:t>
-            </a:r>
-            <a:r>
-              <a:rPr sz="1600" b="1" dirty="0" err="1">
-                <a:solidFill>
-                  <a:srgbClr val="FFFFFF"/>
-                </a:solidFill>
-                <a:latin typeface="Calibri"/>
-              </a:rPr>
-              <a:t>connecte</a:t>
-            </a:r>
-            <a:r>
-              <a:rPr sz="1600" b="1" dirty="0">
-                <a:solidFill>
-                  <a:srgbClr val="FFFFFF"/>
-                </a:solidFill>
-                <a:latin typeface="Calibri"/>
-              </a:rPr>
-              <a:t> de façon </a:t>
-            </a:r>
-            <a:r>
-              <a:rPr sz="1600" b="1" dirty="0" err="1">
-                <a:solidFill>
-                  <a:srgbClr val="FFFFFF"/>
-                </a:solidFill>
-                <a:latin typeface="Calibri"/>
-              </a:rPr>
-              <a:t>sécurisée</a:t>
-            </a:r>
-            <a:r>
-              <a:rPr sz="1600" b="1" dirty="0">
-                <a:solidFill>
-                  <a:srgbClr val="FFFFFF"/>
-                </a:solidFill>
-                <a:latin typeface="Calibri"/>
-              </a:rPr>
-              <a:t>, </a:t>
-            </a:r>
-            <a:r>
-              <a:rPr sz="1600" b="1" dirty="0" err="1">
-                <a:solidFill>
-                  <a:srgbClr val="FFFFFF"/>
-                </a:solidFill>
-                <a:latin typeface="Calibri"/>
-              </a:rPr>
-              <a:t>définit</a:t>
-            </a:r>
-            <a:r>
-              <a:rPr sz="1600" b="1" dirty="0">
-                <a:solidFill>
-                  <a:srgbClr val="FFFFFF"/>
-                </a:solidFill>
-                <a:latin typeface="Calibri"/>
-              </a:rPr>
-              <a:t> les </a:t>
-            </a:r>
-            <a:r>
-              <a:rPr sz="1600" b="1" dirty="0" err="1">
-                <a:solidFill>
-                  <a:srgbClr val="FFFFFF"/>
-                </a:solidFill>
-                <a:latin typeface="Calibri"/>
-              </a:rPr>
-              <a:t>disponibilités</a:t>
-            </a:r>
-            <a:r>
-              <a:rPr sz="1600" b="1" dirty="0">
-                <a:solidFill>
-                  <a:srgbClr val="FFFFFF"/>
-                </a:solidFill>
-                <a:latin typeface="Calibri"/>
-              </a:rPr>
-              <a:t> des </a:t>
-            </a:r>
-            <a:r>
-              <a:rPr sz="1600" b="1" dirty="0" err="1">
-                <a:solidFill>
-                  <a:srgbClr val="FFFFFF"/>
-                </a:solidFill>
-                <a:latin typeface="Calibri"/>
-              </a:rPr>
-              <a:t>médecins</a:t>
-            </a:r>
-            <a:r>
-              <a:rPr sz="1600" b="1" dirty="0">
-                <a:solidFill>
-                  <a:srgbClr val="FFFFFF"/>
-                </a:solidFill>
-                <a:latin typeface="Calibri"/>
-              </a:rPr>
-              <a:t> et </a:t>
-            </a:r>
-            <a:r>
-              <a:rPr sz="1600" b="1" dirty="0" err="1">
-                <a:solidFill>
-                  <a:srgbClr val="FFFFFF"/>
-                </a:solidFill>
-                <a:latin typeface="Calibri"/>
-              </a:rPr>
-              <a:t>réserve</a:t>
-            </a:r>
-            <a:r>
-              <a:rPr sz="1600" b="1" dirty="0">
-                <a:solidFill>
-                  <a:srgbClr val="FFFFFF"/>
-                </a:solidFill>
-                <a:latin typeface="Calibri"/>
-              </a:rPr>
-              <a:t> un </a:t>
-            </a:r>
-            <a:r>
-              <a:rPr sz="1600" b="1" dirty="0" err="1">
-                <a:solidFill>
-                  <a:srgbClr val="FFFFFF"/>
-                </a:solidFill>
-                <a:latin typeface="Calibri"/>
-              </a:rPr>
-              <a:t>rendez</a:t>
-            </a:r>
-            <a:r>
-              <a:rPr sz="1600" b="1" dirty="0">
-                <a:solidFill>
-                  <a:srgbClr val="FFFFFF"/>
-                </a:solidFill>
-                <a:latin typeface="Calibri"/>
-              </a:rPr>
-              <a:t>-vous pour un patient — sans jamais </a:t>
-            </a:r>
-            <a:r>
-              <a:rPr sz="1600" b="1" dirty="0" err="1">
-                <a:solidFill>
-                  <a:srgbClr val="FFFFFF"/>
-                </a:solidFill>
-                <a:latin typeface="Calibri"/>
-              </a:rPr>
-              <a:t>créer</a:t>
-            </a:r>
-            <a:r>
-              <a:rPr sz="1600" b="1" dirty="0">
-                <a:solidFill>
-                  <a:srgbClr val="FFFFFF"/>
-                </a:solidFill>
-                <a:latin typeface="Calibri"/>
-              </a:rPr>
-              <a:t> de double </a:t>
-            </a:r>
-            <a:r>
-              <a:rPr sz="1600" b="1" dirty="0" err="1">
-                <a:solidFill>
-                  <a:srgbClr val="FFFFFF"/>
-                </a:solidFill>
-                <a:latin typeface="Calibri"/>
-              </a:rPr>
-              <a:t>réservation</a:t>
-            </a:r>
-            <a:r>
-              <a:rPr sz="1600" b="1" dirty="0">
-                <a:solidFill>
-                  <a:srgbClr val="FFFFFF"/>
-                </a:solidFill>
-                <a:latin typeface="Calibri"/>
-              </a:rPr>
-              <a:t>.</a:t>
+              <a:t>Une réception se connecte de façon sécurisée, définit les disponibilités des médecins et réserve un rendez-vous pour un patient — sans jamais créer de double réservation.</a:t>
             </a:r>
           </a:p>
         </p:txBody>
@@ -7471,7 +7343,6 @@
           <a:lstStyle/>
           <a:p>
             <a:pPr algn="ctr"/>
-            <a:endParaRPr/>
           </a:p>
         </p:txBody>
       </p:sp>
@@ -7516,7 +7387,6 @@
           <a:lstStyle/>
           <a:p>
             <a:pPr algn="ctr"/>
-            <a:endParaRPr/>
           </a:p>
         </p:txBody>
       </p:sp>
@@ -7551,590 +7421,146 @@
               </a:spcAft>
             </a:pPr>
             <a:r>
-              <a:rPr sz="1600" b="1" dirty="0" err="1">
+              <a:rPr sz="1600" b="1">
                 <a:solidFill>
                   <a:srgbClr val="154D8C"/>
                 </a:solidFill>
                 <a:latin typeface="Calibri"/>
               </a:rPr>
-              <a:t>Fonctionnalités</a:t>
-            </a:r>
-            <a:r>
-              <a:rPr sz="1600" b="1" dirty="0">
-                <a:solidFill>
-                  <a:srgbClr val="154D8C"/>
-                </a:solidFill>
-                <a:latin typeface="Calibri"/>
-              </a:rPr>
-              <a:t> </a:t>
-            </a:r>
-            <a:r>
-              <a:rPr sz="1600" b="1" dirty="0" err="1">
-                <a:solidFill>
-                  <a:srgbClr val="154D8C"/>
-                </a:solidFill>
-                <a:latin typeface="Calibri"/>
-              </a:rPr>
-              <a:t>visées</a:t>
-            </a:r>
-            <a:endParaRPr sz="1600" b="1" dirty="0">
-              <a:solidFill>
-                <a:srgbClr val="154D8C"/>
-              </a:solidFill>
-              <a:latin typeface="Calibri"/>
-            </a:endParaRPr>
-          </a:p>
-          <a:p>
-            <a:pPr algn="l">
-              <a:spcBef>
-                <a:spcPts val="0"/>
-              </a:spcBef>
-              <a:spcAft>
-                <a:spcPts val="300"/>
-              </a:spcAft>
-            </a:pPr>
-            <a:r>
-              <a:rPr sz="1300" b="0" dirty="0">
-                <a:solidFill>
-                  <a:srgbClr val="404040"/>
-                </a:solidFill>
-                <a:latin typeface="Calibri"/>
-              </a:rPr>
-              <a:t>•  </a:t>
-            </a:r>
-            <a:r>
-              <a:rPr sz="1300" b="0" dirty="0" err="1">
-                <a:solidFill>
-                  <a:srgbClr val="404040"/>
-                </a:solidFill>
-                <a:latin typeface="Calibri"/>
-              </a:rPr>
-              <a:t>Authentification</a:t>
-            </a:r>
-            <a:r>
-              <a:rPr sz="1300" b="0" dirty="0">
-                <a:solidFill>
-                  <a:srgbClr val="404040"/>
-                </a:solidFill>
-                <a:latin typeface="Calibri"/>
-              </a:rPr>
-              <a:t> </a:t>
-            </a:r>
-            <a:r>
-              <a:rPr sz="1300" b="0" dirty="0" err="1">
-                <a:solidFill>
-                  <a:srgbClr val="404040"/>
-                </a:solidFill>
-                <a:latin typeface="Calibri"/>
-              </a:rPr>
-              <a:t>complète</a:t>
-            </a:r>
-            <a:r>
-              <a:rPr sz="1300" b="0" dirty="0">
-                <a:solidFill>
-                  <a:srgbClr val="404040"/>
-                </a:solidFill>
-                <a:latin typeface="Calibri"/>
-              </a:rPr>
-              <a:t> + </a:t>
-            </a:r>
-            <a:r>
-              <a:rPr sz="1300" b="0" dirty="0" err="1">
-                <a:solidFill>
-                  <a:srgbClr val="404040"/>
-                </a:solidFill>
-                <a:latin typeface="Calibri"/>
-              </a:rPr>
-              <a:t>contrôle</a:t>
-            </a:r>
-            <a:r>
-              <a:rPr sz="1300" b="0" dirty="0">
-                <a:solidFill>
-                  <a:srgbClr val="404040"/>
-                </a:solidFill>
-                <a:latin typeface="Calibri"/>
-              </a:rPr>
-              <a:t> </a:t>
-            </a:r>
-            <a:r>
-              <a:rPr sz="1300" b="0" dirty="0" err="1">
-                <a:solidFill>
-                  <a:srgbClr val="404040"/>
-                </a:solidFill>
-                <a:latin typeface="Calibri"/>
-              </a:rPr>
-              <a:t>d'accès</a:t>
-            </a:r>
-            <a:r>
-              <a:rPr sz="1300" b="0" dirty="0">
-                <a:solidFill>
-                  <a:srgbClr val="404040"/>
-                </a:solidFill>
-                <a:latin typeface="Calibri"/>
-              </a:rPr>
-              <a:t> (RBAC 4 </a:t>
-            </a:r>
-            <a:r>
-              <a:rPr sz="1300" b="0" dirty="0" err="1">
-                <a:solidFill>
-                  <a:srgbClr val="404040"/>
-                </a:solidFill>
-                <a:latin typeface="Calibri"/>
-              </a:rPr>
-              <a:t>rôles</a:t>
-            </a:r>
-            <a:r>
-              <a:rPr sz="1300" b="0" dirty="0">
-                <a:solidFill>
-                  <a:srgbClr val="404040"/>
-                </a:solidFill>
-                <a:latin typeface="Calibri"/>
-              </a:rPr>
-              <a:t>)</a:t>
-            </a:r>
-          </a:p>
-          <a:p>
-            <a:pPr algn="l">
-              <a:spcBef>
-                <a:spcPts val="0"/>
-              </a:spcBef>
-              <a:spcAft>
-                <a:spcPts val="300"/>
-              </a:spcAft>
-            </a:pPr>
-            <a:r>
-              <a:rPr sz="1300" b="0" dirty="0">
-                <a:solidFill>
-                  <a:srgbClr val="404040"/>
-                </a:solidFill>
-                <a:latin typeface="Calibri"/>
-              </a:rPr>
-              <a:t>•  </a:t>
-            </a:r>
-            <a:r>
-              <a:rPr sz="1300" b="0" dirty="0" err="1">
-                <a:solidFill>
-                  <a:srgbClr val="404040"/>
-                </a:solidFill>
-                <a:latin typeface="Calibri"/>
-              </a:rPr>
-              <a:t>Modéliser</a:t>
-            </a:r>
-            <a:r>
-              <a:rPr sz="1300" b="0" dirty="0">
-                <a:solidFill>
-                  <a:srgbClr val="404040"/>
-                </a:solidFill>
-                <a:latin typeface="Calibri"/>
-              </a:rPr>
-              <a:t> le « patient </a:t>
-            </a:r>
-            <a:r>
-              <a:rPr sz="1300" b="0" dirty="0" err="1">
-                <a:solidFill>
-                  <a:srgbClr val="404040"/>
-                </a:solidFill>
-                <a:latin typeface="Calibri"/>
-              </a:rPr>
-              <a:t>léger</a:t>
-            </a:r>
-            <a:r>
-              <a:rPr sz="1300" b="0" dirty="0">
-                <a:solidFill>
-                  <a:srgbClr val="404040"/>
-                </a:solidFill>
-                <a:latin typeface="Calibri"/>
-              </a:rPr>
-              <a:t> » </a:t>
-            </a:r>
-            <a:r>
-              <a:rPr sz="1300" b="0" dirty="0" err="1">
-                <a:solidFill>
-                  <a:srgbClr val="404040"/>
-                </a:solidFill>
-                <a:latin typeface="Calibri"/>
-              </a:rPr>
-              <a:t>géré</a:t>
-            </a:r>
-            <a:r>
-              <a:rPr sz="1300" b="0" dirty="0">
-                <a:solidFill>
-                  <a:srgbClr val="404040"/>
-                </a:solidFill>
-                <a:latin typeface="Calibri"/>
-              </a:rPr>
-              <a:t> par la </a:t>
-            </a:r>
-            <a:r>
-              <a:rPr sz="1300" b="0" dirty="0" err="1">
-                <a:solidFill>
-                  <a:srgbClr val="404040"/>
-                </a:solidFill>
-                <a:latin typeface="Calibri"/>
-              </a:rPr>
-              <a:t>réception</a:t>
-            </a:r>
-            <a:endParaRPr sz="1300" b="0" dirty="0">
-              <a:solidFill>
-                <a:srgbClr val="404040"/>
-              </a:solidFill>
-              <a:latin typeface="Calibri"/>
-            </a:endParaRPr>
-          </a:p>
-          <a:p>
-            <a:pPr algn="l">
-              <a:spcBef>
-                <a:spcPts val="0"/>
-              </a:spcBef>
-              <a:spcAft>
-                <a:spcPts val="300"/>
-              </a:spcAft>
-            </a:pPr>
-            <a:r>
-              <a:rPr sz="1300" b="0" dirty="0">
-                <a:solidFill>
-                  <a:srgbClr val="404040"/>
-                </a:solidFill>
-                <a:latin typeface="Calibri"/>
-              </a:rPr>
-              <a:t>•  </a:t>
-            </a:r>
-            <a:r>
-              <a:rPr sz="1300" b="0" dirty="0" err="1">
-                <a:solidFill>
-                  <a:srgbClr val="404040"/>
-                </a:solidFill>
-                <a:latin typeface="Calibri"/>
-              </a:rPr>
-              <a:t>Définir</a:t>
-            </a:r>
-            <a:r>
-              <a:rPr sz="1300" b="0" dirty="0">
-                <a:solidFill>
-                  <a:srgbClr val="404040"/>
-                </a:solidFill>
-                <a:latin typeface="Calibri"/>
-              </a:rPr>
-              <a:t> les </a:t>
-            </a:r>
-            <a:r>
-              <a:rPr sz="1300" b="0" dirty="0" err="1">
-                <a:solidFill>
-                  <a:srgbClr val="404040"/>
-                </a:solidFill>
-                <a:latin typeface="Calibri"/>
-              </a:rPr>
-              <a:t>disponibilités</a:t>
-            </a:r>
-            <a:r>
-              <a:rPr sz="1300" b="0" dirty="0">
-                <a:solidFill>
-                  <a:srgbClr val="404040"/>
-                </a:solidFill>
-                <a:latin typeface="Calibri"/>
-              </a:rPr>
-              <a:t> des </a:t>
-            </a:r>
-            <a:r>
-              <a:rPr sz="1300" b="0" dirty="0" err="1">
-                <a:solidFill>
-                  <a:srgbClr val="404040"/>
-                </a:solidFill>
-                <a:latin typeface="Calibri"/>
-              </a:rPr>
-              <a:t>médecins</a:t>
-            </a:r>
-            <a:endParaRPr sz="1300" b="0" dirty="0">
-              <a:solidFill>
-                <a:srgbClr val="404040"/>
-              </a:solidFill>
-              <a:latin typeface="Calibri"/>
-            </a:endParaRPr>
-          </a:p>
-          <a:p>
-            <a:pPr algn="l">
-              <a:spcBef>
-                <a:spcPts val="0"/>
-              </a:spcBef>
-              <a:spcAft>
-                <a:spcPts val="300"/>
-              </a:spcAft>
-            </a:pPr>
-            <a:r>
-              <a:rPr sz="1300" b="0" dirty="0">
-                <a:solidFill>
-                  <a:srgbClr val="404040"/>
-                </a:solidFill>
-                <a:latin typeface="Calibri"/>
-              </a:rPr>
-              <a:t>•  </a:t>
-            </a:r>
-            <a:r>
-              <a:rPr sz="1300" b="0" dirty="0" err="1">
-                <a:solidFill>
-                  <a:srgbClr val="404040"/>
-                </a:solidFill>
-                <a:latin typeface="Calibri"/>
-              </a:rPr>
-              <a:t>Générer</a:t>
-            </a:r>
-            <a:r>
-              <a:rPr sz="1300" b="0" dirty="0">
-                <a:solidFill>
-                  <a:srgbClr val="404040"/>
-                </a:solidFill>
-                <a:latin typeface="Calibri"/>
-              </a:rPr>
-              <a:t> </a:t>
-            </a:r>
-            <a:r>
-              <a:rPr sz="1300" b="0" dirty="0" err="1">
-                <a:solidFill>
-                  <a:srgbClr val="404040"/>
-                </a:solidFill>
-                <a:latin typeface="Calibri"/>
-              </a:rPr>
-              <a:t>automatiquement</a:t>
-            </a:r>
-            <a:r>
-              <a:rPr sz="1300" b="0" dirty="0">
-                <a:solidFill>
-                  <a:srgbClr val="404040"/>
-                </a:solidFill>
-                <a:latin typeface="Calibri"/>
-              </a:rPr>
-              <a:t> les </a:t>
-            </a:r>
-            <a:r>
-              <a:rPr sz="1300" b="0" dirty="0" err="1">
-                <a:solidFill>
-                  <a:srgbClr val="404040"/>
-                </a:solidFill>
-                <a:latin typeface="Calibri"/>
-              </a:rPr>
-              <a:t>créneaux</a:t>
-            </a:r>
-            <a:r>
-              <a:rPr sz="1300" b="0" dirty="0">
-                <a:solidFill>
-                  <a:srgbClr val="404040"/>
-                </a:solidFill>
-                <a:latin typeface="Calibri"/>
-              </a:rPr>
-              <a:t> </a:t>
-            </a:r>
-            <a:r>
-              <a:rPr sz="1300" b="0" dirty="0" err="1">
-                <a:solidFill>
-                  <a:srgbClr val="404040"/>
-                </a:solidFill>
-                <a:latin typeface="Calibri"/>
-              </a:rPr>
-              <a:t>réservables</a:t>
-            </a:r>
-            <a:endParaRPr sz="1300" b="0" dirty="0">
-              <a:solidFill>
-                <a:srgbClr val="404040"/>
-              </a:solidFill>
-              <a:latin typeface="Calibri"/>
-            </a:endParaRPr>
-          </a:p>
-          <a:p>
-            <a:pPr algn="l">
-              <a:spcBef>
-                <a:spcPts val="0"/>
-              </a:spcBef>
-              <a:spcAft>
-                <a:spcPts val="300"/>
-              </a:spcAft>
-            </a:pPr>
-            <a:r>
-              <a:rPr sz="1300" b="0" dirty="0">
-                <a:solidFill>
-                  <a:srgbClr val="404040"/>
-                </a:solidFill>
-                <a:latin typeface="Calibri"/>
-              </a:rPr>
-              <a:t>•  </a:t>
-            </a:r>
-            <a:r>
-              <a:rPr sz="1300" b="0" dirty="0" err="1">
-                <a:solidFill>
-                  <a:srgbClr val="404040"/>
-                </a:solidFill>
-                <a:latin typeface="Calibri"/>
-              </a:rPr>
-              <a:t>Réserver</a:t>
-            </a:r>
-            <a:r>
-              <a:rPr sz="1300" b="0" dirty="0">
-                <a:solidFill>
-                  <a:srgbClr val="404040"/>
-                </a:solidFill>
-                <a:latin typeface="Calibri"/>
-              </a:rPr>
-              <a:t> un </a:t>
-            </a:r>
-            <a:r>
-              <a:rPr sz="1300" b="0" dirty="0" err="1">
-                <a:solidFill>
-                  <a:srgbClr val="404040"/>
-                </a:solidFill>
-                <a:latin typeface="Calibri"/>
-              </a:rPr>
-              <a:t>rendez</a:t>
-            </a:r>
-            <a:r>
-              <a:rPr sz="1300" b="0" dirty="0">
-                <a:solidFill>
-                  <a:srgbClr val="404040"/>
-                </a:solidFill>
-                <a:latin typeface="Calibri"/>
-              </a:rPr>
-              <a:t>-vous (</a:t>
-            </a:r>
-            <a:r>
-              <a:rPr sz="1300" b="0" dirty="0" err="1">
-                <a:solidFill>
-                  <a:srgbClr val="404040"/>
-                </a:solidFill>
-                <a:latin typeface="Calibri"/>
-              </a:rPr>
-              <a:t>réception</a:t>
-            </a:r>
-            <a:r>
-              <a:rPr sz="1300" b="0" dirty="0">
-                <a:solidFill>
-                  <a:srgbClr val="404040"/>
-                </a:solidFill>
-                <a:latin typeface="Calibri"/>
-              </a:rPr>
-              <a:t>) sans double-</a:t>
-            </a:r>
-            <a:r>
-              <a:rPr sz="1300" b="0" dirty="0" err="1">
-                <a:solidFill>
-                  <a:srgbClr val="404040"/>
-                </a:solidFill>
-                <a:latin typeface="Calibri"/>
-              </a:rPr>
-              <a:t>réservation</a:t>
-            </a:r>
-            <a:endParaRPr sz="1300" b="0" dirty="0">
-              <a:solidFill>
-                <a:srgbClr val="404040"/>
-              </a:solidFill>
-              <a:latin typeface="Calibri"/>
-            </a:endParaRPr>
-          </a:p>
-          <a:p>
-            <a:pPr algn="l">
-              <a:spcBef>
-                <a:spcPts val="0"/>
-              </a:spcBef>
-              <a:spcAft>
-                <a:spcPts val="300"/>
-              </a:spcAft>
-            </a:pPr>
-            <a:r>
-              <a:rPr sz="1300" b="0" dirty="0">
-                <a:solidFill>
-                  <a:srgbClr val="404040"/>
-                </a:solidFill>
-                <a:latin typeface="Calibri"/>
-              </a:rPr>
-              <a:t>•  </a:t>
-            </a:r>
-            <a:r>
-              <a:rPr sz="1300" b="0" dirty="0" err="1">
-                <a:solidFill>
-                  <a:srgbClr val="404040"/>
-                </a:solidFill>
-                <a:latin typeface="Calibri"/>
-              </a:rPr>
-              <a:t>Suivre</a:t>
-            </a:r>
-            <a:r>
-              <a:rPr sz="1300" b="0" dirty="0">
-                <a:solidFill>
-                  <a:srgbClr val="404040"/>
-                </a:solidFill>
-                <a:latin typeface="Calibri"/>
-              </a:rPr>
-              <a:t> le flux </a:t>
-            </a:r>
-            <a:r>
-              <a:rPr sz="1300" b="0" dirty="0" err="1">
-                <a:solidFill>
-                  <a:srgbClr val="404040"/>
-                </a:solidFill>
-                <a:latin typeface="Calibri"/>
-              </a:rPr>
-              <a:t>clinique</a:t>
-            </a:r>
-            <a:r>
-              <a:rPr sz="1300" b="0" dirty="0">
-                <a:solidFill>
-                  <a:srgbClr val="404040"/>
-                </a:solidFill>
-                <a:latin typeface="Calibri"/>
-              </a:rPr>
-              <a:t> du jour (</a:t>
-            </a:r>
-            <a:r>
-              <a:rPr sz="1300" b="0" dirty="0" err="1">
-                <a:solidFill>
-                  <a:srgbClr val="404040"/>
-                </a:solidFill>
-                <a:latin typeface="Calibri"/>
-              </a:rPr>
-              <a:t>statuts</a:t>
-            </a:r>
-            <a:r>
-              <a:rPr sz="1300" b="0" dirty="0">
-                <a:solidFill>
-                  <a:srgbClr val="404040"/>
-                </a:solidFill>
-                <a:latin typeface="Calibri"/>
-              </a:rPr>
-              <a:t> de consultation)</a:t>
-            </a:r>
-          </a:p>
-          <a:p>
-            <a:pPr algn="l">
-              <a:spcBef>
-                <a:spcPts val="0"/>
-              </a:spcBef>
-              <a:spcAft>
-                <a:spcPts val="300"/>
-              </a:spcAft>
-            </a:pPr>
-            <a:r>
-              <a:rPr sz="1300" b="0" dirty="0">
-                <a:solidFill>
-                  <a:srgbClr val="404040"/>
-                </a:solidFill>
-                <a:latin typeface="Calibri"/>
-              </a:rPr>
-              <a:t>•  Interface soignée + mode </a:t>
-            </a:r>
-            <a:r>
-              <a:rPr sz="1300" b="0" dirty="0" err="1">
-                <a:solidFill>
-                  <a:srgbClr val="404040"/>
-                </a:solidFill>
-                <a:latin typeface="Calibri"/>
-              </a:rPr>
-              <a:t>sombre</a:t>
-            </a:r>
-            <a:r>
-              <a:rPr sz="1300" b="0" dirty="0">
-                <a:solidFill>
-                  <a:srgbClr val="404040"/>
-                </a:solidFill>
-                <a:latin typeface="Calibri"/>
-              </a:rPr>
-              <a:t> (design system)</a:t>
+              <a:t>Fonctionnalités visées</a:t>
+            </a:r>
+          </a:p>
+          <a:p>
+            <a:pPr algn="l">
+              <a:spcBef>
+                <a:spcPts val="0"/>
+              </a:spcBef>
+              <a:spcAft>
+                <a:spcPts val="300"/>
+              </a:spcAft>
+            </a:pPr>
+            <a:r>
+              <a:rPr sz="1300" b="0">
+                <a:solidFill>
+                  <a:srgbClr val="404040"/>
+                </a:solidFill>
+                <a:latin typeface="Calibri"/>
+              </a:rPr>
+              <a:t>•  Authentification complète + contrôle d'accès (RBAC 4 rôles)</a:t>
+            </a:r>
+          </a:p>
+          <a:p>
+            <a:pPr algn="l">
+              <a:spcBef>
+                <a:spcPts val="0"/>
+              </a:spcBef>
+              <a:spcAft>
+                <a:spcPts val="300"/>
+              </a:spcAft>
+            </a:pPr>
+            <a:r>
+              <a:rPr sz="1300" b="0">
+                <a:solidFill>
+                  <a:srgbClr val="404040"/>
+                </a:solidFill>
+                <a:latin typeface="Calibri"/>
+              </a:rPr>
+              <a:t>•  Modéliser le « patient léger » géré par la réception</a:t>
+            </a:r>
+          </a:p>
+          <a:p>
+            <a:pPr algn="l">
+              <a:spcBef>
+                <a:spcPts val="0"/>
+              </a:spcBef>
+              <a:spcAft>
+                <a:spcPts val="300"/>
+              </a:spcAft>
+            </a:pPr>
+            <a:r>
+              <a:rPr sz="1300" b="0">
+                <a:solidFill>
+                  <a:srgbClr val="404040"/>
+                </a:solidFill>
+                <a:latin typeface="Calibri"/>
+              </a:rPr>
+              <a:t>•  Définir les disponibilités des médecins</a:t>
+            </a:r>
+          </a:p>
+          <a:p>
+            <a:pPr algn="l">
+              <a:spcBef>
+                <a:spcPts val="0"/>
+              </a:spcBef>
+              <a:spcAft>
+                <a:spcPts val="300"/>
+              </a:spcAft>
+            </a:pPr>
+            <a:r>
+              <a:rPr sz="1300" b="0">
+                <a:solidFill>
+                  <a:srgbClr val="404040"/>
+                </a:solidFill>
+                <a:latin typeface="Calibri"/>
+              </a:rPr>
+              <a:t>•  Générer automatiquement les créneaux réservables</a:t>
+            </a:r>
+          </a:p>
+          <a:p>
+            <a:pPr algn="l">
+              <a:spcBef>
+                <a:spcPts val="0"/>
+              </a:spcBef>
+              <a:spcAft>
+                <a:spcPts val="300"/>
+              </a:spcAft>
+            </a:pPr>
+            <a:r>
+              <a:rPr sz="1300" b="0">
+                <a:solidFill>
+                  <a:srgbClr val="404040"/>
+                </a:solidFill>
+                <a:latin typeface="Calibri"/>
+              </a:rPr>
+              <a:t>•  Réserver un rendez-vous (réception) sans double-réservation</a:t>
+            </a:r>
+          </a:p>
+          <a:p>
+            <a:pPr algn="l">
+              <a:spcBef>
+                <a:spcPts val="0"/>
+              </a:spcBef>
+              <a:spcAft>
+                <a:spcPts val="300"/>
+              </a:spcAft>
+            </a:pPr>
+            <a:r>
+              <a:rPr sz="1300" b="0">
+                <a:solidFill>
+                  <a:srgbClr val="404040"/>
+                </a:solidFill>
+                <a:latin typeface="Calibri"/>
+              </a:rPr>
+              <a:t>•  Suivre le flux clinique du jour (statuts de consultation)</a:t>
+            </a:r>
+          </a:p>
+          <a:p>
+            <a:pPr algn="l">
+              <a:spcBef>
+                <a:spcPts val="0"/>
+              </a:spcBef>
+              <a:spcAft>
+                <a:spcPts val="300"/>
+              </a:spcAft>
+            </a:pPr>
+            <a:r>
+              <a:rPr sz="1300" b="0">
+                <a:solidFill>
+                  <a:srgbClr val="404040"/>
+                </a:solidFill>
+                <a:latin typeface="Calibri"/>
+              </a:rPr>
+              <a:t>•  Interface soignée + mode sombre (design system)</a:t>
             </a:r>
           </a:p>
         </p:txBody>
@@ -8180,7 +7606,6 @@
           <a:lstStyle/>
           <a:p>
             <a:pPr algn="ctr"/>
-            <a:endParaRPr/>
           </a:p>
         </p:txBody>
       </p:sp>
@@ -8225,7 +7650,6 @@
           <a:lstStyle/>
           <a:p>
             <a:pPr algn="ctr"/>
-            <a:endParaRPr/>
           </a:p>
         </p:txBody>
       </p:sp>
@@ -8500,7 +7924,7 @@
 </file>
 
 <file path=ppt/slides/slide4.xml><?xml version="1.0" encoding="utf-8"?>
-<p:sld xmlns:a="http://schemas.openxmlformats.org/drawingml/2006/main" xmlns:r="http://schemas.openxmlformats.org/officeDocument/2006/relationships" xmlns:p="http://schemas.openxmlformats.org/presentationml/2006/main">
+<p:sld xmlns:a="http://schemas.openxmlformats.org/drawingml/2006/main" xmlns:p="http://schemas.openxmlformats.org/presentationml/2006/main" xmlns:r="http://schemas.openxmlformats.org/officeDocument/2006/relationships">
   <p:cSld>
     <p:bg>
       <p:bgPr>
@@ -8516,14 +7940,7 @@
         <p:cNvGrpSpPr/>
         <p:nvPr/>
       </p:nvGrpSpPr>
-      <p:grpSpPr>
-        <a:xfrm>
-          <a:off x="0" y="0"/>
-          <a:ext cx="0" cy="0"/>
-          <a:chOff x="0" y="0"/>
-          <a:chExt cx="0" cy="0"/>
-        </a:xfrm>
-      </p:grpSpPr>
+      <p:grpSpPr/>
       <p:sp>
         <p:nvSpPr>
           <p:cNvPr id="2" name="Rectangle 1"/>
@@ -8565,7 +7982,6 @@
           <a:lstStyle/>
           <a:p>
             <a:pPr algn="ctr"/>
-            <a:endParaRPr/>
           </a:p>
         </p:txBody>
       </p:sp>
@@ -8610,7 +8026,6 @@
           <a:lstStyle/>
           <a:p>
             <a:pPr algn="ctr"/>
-            <a:endParaRPr/>
           </a:p>
         </p:txBody>
       </p:sp>
@@ -8651,7 +8066,7 @@
           </a:fontRef>
         </p:style>
         <p:txBody>
-          <a:bodyPr wrap="none" rtlCol="0" anchor="ctr"/>
+          <a:bodyPr rtlCol="0" anchor="ctr" wrap="none"/>
           <a:lstStyle/>
           <a:p>
             <a:pPr algn="ctr"/>
@@ -8768,7 +8183,6 @@
           <a:lstStyle/>
           <a:p>
             <a:pPr algn="ctr"/>
-            <a:endParaRPr/>
           </a:p>
         </p:txBody>
       </p:sp>
@@ -8912,7 +8326,6 @@
           <a:lstStyle/>
           <a:p>
             <a:pPr algn="ctr"/>
-            <a:endParaRPr/>
           </a:p>
         </p:txBody>
       </p:sp>
@@ -9056,7 +8469,6 @@
           <a:lstStyle/>
           <a:p>
             <a:pPr algn="ctr"/>
-            <a:endParaRPr/>
           </a:p>
         </p:txBody>
       </p:sp>
@@ -9200,7 +8612,6 @@
           <a:lstStyle/>
           <a:p>
             <a:pPr algn="ctr"/>
-            <a:endParaRPr/>
           </a:p>
         </p:txBody>
       </p:sp>
@@ -9245,7 +8656,6 @@
           <a:lstStyle/>
           <a:p>
             <a:pPr algn="ctr"/>
-            <a:endParaRPr/>
           </a:p>
         </p:txBody>
       </p:sp>
@@ -9290,7 +8700,6 @@
           <a:lstStyle/>
           <a:p>
             <a:pPr algn="ctr"/>
-            <a:endParaRPr/>
           </a:p>
         </p:txBody>
       </p:sp>
@@ -9335,7 +8744,6 @@
           <a:lstStyle/>
           <a:p>
             <a:pPr algn="ctr"/>
-            <a:endParaRPr/>
           </a:p>
         </p:txBody>
       </p:sp>
@@ -9534,7 +8942,7 @@
 </file>
 
 <file path=ppt/slides/slide5.xml><?xml version="1.0" encoding="utf-8"?>
-<p:sld xmlns:a="http://schemas.openxmlformats.org/drawingml/2006/main" xmlns:r="http://schemas.openxmlformats.org/officeDocument/2006/relationships" xmlns:p="http://schemas.openxmlformats.org/presentationml/2006/main">
+<p:sld xmlns:a="http://schemas.openxmlformats.org/drawingml/2006/main" xmlns:p="http://schemas.openxmlformats.org/presentationml/2006/main" xmlns:r="http://schemas.openxmlformats.org/officeDocument/2006/relationships">
   <p:cSld>
     <p:bg>
       <p:bgPr>
@@ -9550,14 +8958,7 @@
         <p:cNvGrpSpPr/>
         <p:nvPr/>
       </p:nvGrpSpPr>
-      <p:grpSpPr>
-        <a:xfrm>
-          <a:off x="0" y="0"/>
-          <a:ext cx="0" cy="0"/>
-          <a:chOff x="0" y="0"/>
-          <a:chExt cx="0" cy="0"/>
-        </a:xfrm>
-      </p:grpSpPr>
+      <p:grpSpPr/>
       <p:sp>
         <p:nvSpPr>
           <p:cNvPr id="2" name="Rectangle 1"/>
@@ -9599,7 +9000,6 @@
           <a:lstStyle/>
           <a:p>
             <a:pPr algn="ctr"/>
-            <a:endParaRPr/>
           </a:p>
         </p:txBody>
       </p:sp>
@@ -9644,7 +9044,6 @@
           <a:lstStyle/>
           <a:p>
             <a:pPr algn="ctr"/>
-            <a:endParaRPr/>
           </a:p>
         </p:txBody>
       </p:sp>
@@ -9685,7 +9084,7 @@
           </a:fontRef>
         </p:style>
         <p:txBody>
-          <a:bodyPr wrap="none" rtlCol="0" anchor="ctr"/>
+          <a:bodyPr rtlCol="0" anchor="ctr" wrap="none"/>
           <a:lstStyle/>
           <a:p>
             <a:pPr algn="ctr"/>
@@ -9802,7 +9201,6 @@
           <a:lstStyle/>
           <a:p>
             <a:pPr algn="ctr"/>
-            <a:endParaRPr/>
           </a:p>
         </p:txBody>
       </p:sp>
@@ -9847,7 +9245,6 @@
           <a:lstStyle/>
           <a:p>
             <a:pPr algn="ctr"/>
-            <a:endParaRPr/>
           </a:p>
         </p:txBody>
       </p:sp>
@@ -10143,7 +9540,6 @@
           <a:lstStyle/>
           <a:p>
             <a:pPr algn="ctr"/>
-            <a:endParaRPr/>
           </a:p>
         </p:txBody>
       </p:sp>
@@ -10188,7 +9584,6 @@
           <a:lstStyle/>
           <a:p>
             <a:pPr algn="ctr"/>
-            <a:endParaRPr/>
           </a:p>
         </p:txBody>
       </p:sp>
@@ -10465,7 +9860,6 @@
           <a:lstStyle/>
           <a:p>
             <a:pPr algn="ctr"/>
-            <a:endParaRPr/>
           </a:p>
         </p:txBody>
       </p:sp>
@@ -10510,7 +9904,6 @@
           <a:lstStyle/>
           <a:p>
             <a:pPr algn="ctr"/>
-            <a:endParaRPr/>
           </a:p>
         </p:txBody>
       </p:sp>
@@ -10823,7 +10216,7 @@
 </file>
 
 <file path=ppt/slides/slide6.xml><?xml version="1.0" encoding="utf-8"?>
-<p:sld xmlns:a="http://schemas.openxmlformats.org/drawingml/2006/main" xmlns:r="http://schemas.openxmlformats.org/officeDocument/2006/relationships" xmlns:p="http://schemas.openxmlformats.org/presentationml/2006/main">
+<p:sld xmlns:a="http://schemas.openxmlformats.org/drawingml/2006/main" xmlns:p="http://schemas.openxmlformats.org/presentationml/2006/main" xmlns:r="http://schemas.openxmlformats.org/officeDocument/2006/relationships">
   <p:cSld>
     <p:bg>
       <p:bgPr>
@@ -10839,14 +10232,7 @@
         <p:cNvGrpSpPr/>
         <p:nvPr/>
       </p:nvGrpSpPr>
-      <p:grpSpPr>
-        <a:xfrm>
-          <a:off x="0" y="0"/>
-          <a:ext cx="0" cy="0"/>
-          <a:chOff x="0" y="0"/>
-          <a:chExt cx="0" cy="0"/>
-        </a:xfrm>
-      </p:grpSpPr>
+      <p:grpSpPr/>
       <p:sp>
         <p:nvSpPr>
           <p:cNvPr id="2" name="Rectangle 1"/>
@@ -10888,7 +10274,6 @@
           <a:lstStyle/>
           <a:p>
             <a:pPr algn="ctr"/>
-            <a:endParaRPr/>
           </a:p>
         </p:txBody>
       </p:sp>
@@ -10933,7 +10318,6 @@
           <a:lstStyle/>
           <a:p>
             <a:pPr algn="ctr"/>
-            <a:endParaRPr/>
           </a:p>
         </p:txBody>
       </p:sp>
@@ -10974,7 +10358,7 @@
           </a:fontRef>
         </p:style>
         <p:txBody>
-          <a:bodyPr wrap="none" rtlCol="0" anchor="ctr"/>
+          <a:bodyPr rtlCol="0" anchor="ctr" wrap="none"/>
           <a:lstStyle/>
           <a:p>
             <a:pPr algn="ctr"/>
@@ -11091,7 +10475,6 @@
           <a:lstStyle/>
           <a:p>
             <a:pPr algn="ctr"/>
-            <a:endParaRPr/>
           </a:p>
         </p:txBody>
       </p:sp>
@@ -11136,7 +10519,6 @@
           <a:lstStyle/>
           <a:p>
             <a:pPr algn="ctr"/>
-            <a:endParaRPr/>
           </a:p>
         </p:txBody>
       </p:sp>
@@ -11234,7 +10616,7 @@
                 </a:solidFill>
                 <a:latin typeface="Calibri"/>
               </a:rPr>
-              <a:t>•  2.  Disponibilités → saisir une plage datée + une durée</a:t>
+              <a:t>•  2.  Tableau de bord → le compteur « RDV du jour » est un chiffre réel</a:t>
             </a:r>
           </a:p>
           <a:p>
@@ -11253,6 +10635,25 @@
                 </a:solidFill>
                 <a:latin typeface="Calibri"/>
               </a:rPr>
+              <a:t>•  3.  Disponibilités → saisir une plage datée + une durée</a:t>
+            </a:r>
+          </a:p>
+          <a:p>
+            <a:pPr algn="l">
+              <a:spcBef>
+                <a:spcPts val="0"/>
+              </a:spcBef>
+              <a:spcAft>
+                <a:spcPts val="300"/>
+              </a:spcAft>
+            </a:pPr>
+            <a:r>
+              <a:rPr sz="1300" b="0">
+                <a:solidFill>
+                  <a:srgbClr val="404040"/>
+                </a:solidFill>
+                <a:latin typeface="Calibri"/>
+              </a:rPr>
               <a:t>•       → le système génère seul les créneaux réservables</a:t>
             </a:r>
           </a:p>
@@ -11272,7 +10673,7 @@
                 </a:solidFill>
                 <a:latin typeface="Calibri"/>
               </a:rPr>
-              <a:t>•  3.  Réserver → choisir médecin, créneau libre, patient, motif</a:t>
+              <a:t>•  4.  Réserver → choisir médecin, créneau libre, patient, motif</a:t>
             </a:r>
           </a:p>
           <a:p>
@@ -11310,7 +10711,7 @@
                 </a:solidFill>
                 <a:latin typeface="Calibri"/>
               </a:rPr>
-              <a:t>•  4.  Flux du jour → dérouler le cycle : Arrivé → En consultation</a:t>
+              <a:t>•  5.  Flux du jour → cycle : Arrivé → En consultation → Terminé</a:t>
             </a:r>
           </a:p>
           <a:p>
@@ -11329,7 +10730,7 @@
                 </a:solidFill>
                 <a:latin typeface="Calibri"/>
               </a:rPr>
-              <a:t>•       → Terminé (ou Absent)</a:t>
+              <a:t>•  6.  Annuler un rendez-vous avec motif → le créneau se libère</a:t>
             </a:r>
           </a:p>
           <a:p>
@@ -11348,7 +10749,7 @@
                 </a:solidFill>
                 <a:latin typeface="Calibri"/>
               </a:rPr>
-              <a:t>•  5.  Annuler un rendez-vous avec motif → le créneau se libère</a:t>
+              <a:t>•       et redevient réservable  (fonctionnalité déjà livrée)</a:t>
             </a:r>
           </a:p>
           <a:p>
@@ -11367,7 +10768,7 @@
                 </a:solidFill>
                 <a:latin typeface="Calibri"/>
               </a:rPr>
-              <a:t>•       et redevient réservable  (fonctionnalité déjà livrée)</a:t>
+              <a:t>•  7.  RBAC visible : « Utilisateurs » disparaît pour un médecin</a:t>
             </a:r>
           </a:p>
           <a:p>
@@ -11386,26 +10787,7 @@
                 </a:solidFill>
                 <a:latin typeface="Calibri"/>
               </a:rPr>
-              <a:t>•  6.  RBAC visible : « Utilisateurs » disparaît pour un médecin</a:t>
-            </a:r>
-          </a:p>
-          <a:p>
-            <a:pPr algn="l">
-              <a:spcBef>
-                <a:spcPts val="0"/>
-              </a:spcBef>
-              <a:spcAft>
-                <a:spcPts val="300"/>
-              </a:spcAft>
-            </a:pPr>
-            <a:r>
-              <a:rPr sz="1300" b="0">
-                <a:solidFill>
-                  <a:srgbClr val="404040"/>
-                </a:solidFill>
-                <a:latin typeface="Calibri"/>
-              </a:rPr>
-              <a:t>•  7.  Mode sombre en un clic</a:t>
+              <a:t>•  8.  Mode sombre en un clic</a:t>
             </a:r>
           </a:p>
         </p:txBody>
@@ -11451,7 +10833,6 @@
           <a:lstStyle/>
           <a:p>
             <a:pPr algn="ctr"/>
-            <a:endParaRPr/>
           </a:p>
         </p:txBody>
       </p:sp>
@@ -11496,7 +10877,6 @@
           <a:lstStyle/>
           <a:p>
             <a:pPr algn="ctr"/>
-            <a:endParaRPr/>
           </a:p>
         </p:txBody>
       </p:sp>
@@ -11904,7 +11284,7 @@
 </file>
 
 <file path=ppt/slides/slide7.xml><?xml version="1.0" encoding="utf-8"?>
-<p:sld xmlns:a="http://schemas.openxmlformats.org/drawingml/2006/main" xmlns:r="http://schemas.openxmlformats.org/officeDocument/2006/relationships" xmlns:p="http://schemas.openxmlformats.org/presentationml/2006/main">
+<p:sld xmlns:a="http://schemas.openxmlformats.org/drawingml/2006/main" xmlns:p="http://schemas.openxmlformats.org/presentationml/2006/main" xmlns:r="http://schemas.openxmlformats.org/officeDocument/2006/relationships">
   <p:cSld>
     <p:bg>
       <p:bgPr>
@@ -11920,14 +11300,7 @@
         <p:cNvGrpSpPr/>
         <p:nvPr/>
       </p:nvGrpSpPr>
-      <p:grpSpPr>
-        <a:xfrm>
-          <a:off x="0" y="0"/>
-          <a:ext cx="0" cy="0"/>
-          <a:chOff x="0" y="0"/>
-          <a:chExt cx="0" cy="0"/>
-        </a:xfrm>
-      </p:grpSpPr>
+      <p:grpSpPr/>
       <p:sp>
         <p:nvSpPr>
           <p:cNvPr id="2" name="Rectangle 1"/>
@@ -11969,7 +11342,6 @@
           <a:lstStyle/>
           <a:p>
             <a:pPr algn="ctr"/>
-            <a:endParaRPr/>
           </a:p>
         </p:txBody>
       </p:sp>
@@ -12014,7 +11386,6 @@
           <a:lstStyle/>
           <a:p>
             <a:pPr algn="ctr"/>
-            <a:endParaRPr/>
           </a:p>
         </p:txBody>
       </p:sp>
@@ -12055,7 +11426,7 @@
           </a:fontRef>
         </p:style>
         <p:txBody>
-          <a:bodyPr wrap="none" rtlCol="0" anchor="ctr"/>
+          <a:bodyPr rtlCol="0" anchor="ctr" wrap="none"/>
           <a:lstStyle/>
           <a:p>
             <a:pPr algn="ctr"/>
@@ -12172,7 +11543,6 @@
           <a:lstStyle/>
           <a:p>
             <a:pPr algn="ctr"/>
-            <a:endParaRPr/>
           </a:p>
         </p:txBody>
       </p:sp>
@@ -12278,7 +11648,6 @@
           <a:lstStyle/>
           <a:p>
             <a:pPr algn="ctr"/>
-            <a:endParaRPr/>
           </a:p>
         </p:txBody>
       </p:sp>
@@ -12384,7 +11753,6 @@
           <a:lstStyle/>
           <a:p>
             <a:pPr algn="ctr"/>
-            <a:endParaRPr/>
           </a:p>
         </p:txBody>
       </p:sp>
@@ -12490,7 +11858,6 @@
           <a:lstStyle/>
           <a:p>
             <a:pPr algn="ctr"/>
-            <a:endParaRPr/>
           </a:p>
         </p:txBody>
       </p:sp>
@@ -12596,7 +11963,6 @@
           <a:lstStyle/>
           <a:p>
             <a:pPr algn="ctr"/>
-            <a:endParaRPr/>
           </a:p>
         </p:txBody>
       </p:sp>
@@ -12641,7 +12007,6 @@
           <a:lstStyle/>
           <a:p>
             <a:pPr algn="ctr"/>
-            <a:endParaRPr/>
           </a:p>
         </p:txBody>
       </p:sp>
@@ -12861,7 +12226,6 @@
           <a:lstStyle/>
           <a:p>
             <a:pPr algn="ctr"/>
-            <a:endParaRPr/>
           </a:p>
         </p:txBody>
       </p:sp>
@@ -12906,7 +12270,6 @@
           <a:lstStyle/>
           <a:p>
             <a:pPr algn="ctr"/>
-            <a:endParaRPr/>
           </a:p>
         </p:txBody>
       </p:sp>
@@ -13162,7 +12525,7 @@
 </file>
 
 <file path=ppt/slides/slide8.xml><?xml version="1.0" encoding="utf-8"?>
-<p:sld xmlns:a="http://schemas.openxmlformats.org/drawingml/2006/main" xmlns:r="http://schemas.openxmlformats.org/officeDocument/2006/relationships" xmlns:p="http://schemas.openxmlformats.org/presentationml/2006/main">
+<p:sld xmlns:a="http://schemas.openxmlformats.org/drawingml/2006/main" xmlns:p="http://schemas.openxmlformats.org/presentationml/2006/main" xmlns:r="http://schemas.openxmlformats.org/officeDocument/2006/relationships">
   <p:cSld>
     <p:bg>
       <p:bgPr>
@@ -13178,14 +12541,7 @@
         <p:cNvGrpSpPr/>
         <p:nvPr/>
       </p:nvGrpSpPr>
-      <p:grpSpPr>
-        <a:xfrm>
-          <a:off x="0" y="0"/>
-          <a:ext cx="0" cy="0"/>
-          <a:chOff x="0" y="0"/>
-          <a:chExt cx="0" cy="0"/>
-        </a:xfrm>
-      </p:grpSpPr>
+      <p:grpSpPr/>
       <p:sp>
         <p:nvSpPr>
           <p:cNvPr id="2" name="Rectangle 1"/>
@@ -13227,7 +12583,6 @@
           <a:lstStyle/>
           <a:p>
             <a:pPr algn="ctr"/>
-            <a:endParaRPr/>
           </a:p>
         </p:txBody>
       </p:sp>
@@ -13272,7 +12627,6 @@
           <a:lstStyle/>
           <a:p>
             <a:pPr algn="ctr"/>
-            <a:endParaRPr/>
           </a:p>
         </p:txBody>
       </p:sp>
@@ -13313,7 +12667,7 @@
           </a:fontRef>
         </p:style>
         <p:txBody>
-          <a:bodyPr wrap="none" rtlCol="0" anchor="ctr"/>
+          <a:bodyPr rtlCol="0" anchor="ctr" wrap="none"/>
           <a:lstStyle/>
           <a:p>
             <a:pPr algn="ctr"/>
@@ -13430,7 +12784,6 @@
           <a:lstStyle/>
           <a:p>
             <a:pPr algn="ctr"/>
-            <a:endParaRPr/>
           </a:p>
         </p:txBody>
       </p:sp>
@@ -13475,7 +12828,6 @@
           <a:lstStyle/>
           <a:p>
             <a:pPr algn="ctr"/>
-            <a:endParaRPr/>
           </a:p>
         </p:txBody>
       </p:sp>
@@ -13592,7 +12944,7 @@
                 </a:solidFill>
                 <a:latin typeface="Calibri"/>
               </a:rPr>
-              <a:t>•  Solution : réintégration manuelle, puis 6 règles de</a:t>
+              <a:t>•  Solution : réintégration manuelle, puis 6 règles (socle</a:t>
             </a:r>
           </a:p>
           <a:p>
@@ -13611,7 +12963,7 @@
                 </a:solidFill>
                 <a:latin typeface="Calibri"/>
               </a:rPr>
-              <a:t>•     travail (socle d'abord, PR sous 72 h, un module par</a:t>
+              <a:t>•     d'abord, PR sous 72 h, un module par ticket, gates de</a:t>
             </a:r>
           </a:p>
           <a:p>
@@ -13630,7 +12982,7 @@
                 </a:solidFill>
                 <a:latin typeface="Calibri"/>
               </a:rPr>
-              <a:t>•     ticket, gates de fusion, point d'intégration à mi-sprint)</a:t>
+              <a:t>•     fusion, point à mi-sprint, « terminé » = fusionné dans dev)</a:t>
             </a:r>
           </a:p>
         </p:txBody>
@@ -13676,7 +13028,6 @@
           <a:lstStyle/>
           <a:p>
             <a:pPr algn="ctr"/>
-            <a:endParaRPr/>
           </a:p>
         </p:txBody>
       </p:sp>
@@ -13721,7 +13072,6 @@
           <a:lstStyle/>
           <a:p>
             <a:pPr algn="ctr"/>
-            <a:endParaRPr/>
           </a:p>
         </p:txBody>
       </p:sp>
@@ -13922,7 +13272,6 @@
           <a:lstStyle/>
           <a:p>
             <a:pPr algn="ctr"/>
-            <a:endParaRPr/>
           </a:p>
         </p:txBody>
       </p:sp>
@@ -13967,7 +13316,6 @@
           <a:lstStyle/>
           <a:p>
             <a:pPr algn="ctr"/>
-            <a:endParaRPr/>
           </a:p>
         </p:txBody>
       </p:sp>
@@ -14166,7 +13514,7 @@
 </file>
 
 <file path=ppt/slides/slide9.xml><?xml version="1.0" encoding="utf-8"?>
-<p:sld xmlns:a="http://schemas.openxmlformats.org/drawingml/2006/main" xmlns:r="http://schemas.openxmlformats.org/officeDocument/2006/relationships" xmlns:p="http://schemas.openxmlformats.org/presentationml/2006/main">
+<p:sld xmlns:a="http://schemas.openxmlformats.org/drawingml/2006/main" xmlns:p="http://schemas.openxmlformats.org/presentationml/2006/main" xmlns:r="http://schemas.openxmlformats.org/officeDocument/2006/relationships">
   <p:cSld>
     <p:bg>
       <p:bgPr>
@@ -14182,14 +13530,7 @@
         <p:cNvGrpSpPr/>
         <p:nvPr/>
       </p:nvGrpSpPr>
-      <p:grpSpPr>
-        <a:xfrm>
-          <a:off x="0" y="0"/>
-          <a:ext cx="0" cy="0"/>
-          <a:chOff x="0" y="0"/>
-          <a:chExt cx="0" cy="0"/>
-        </a:xfrm>
-      </p:grpSpPr>
+      <p:grpSpPr/>
       <p:sp>
         <p:nvSpPr>
           <p:cNvPr id="2" name="Rectangle 1"/>
@@ -14231,7 +13572,6 @@
           <a:lstStyle/>
           <a:p>
             <a:pPr algn="ctr"/>
-            <a:endParaRPr/>
           </a:p>
         </p:txBody>
       </p:sp>
@@ -14276,7 +13616,6 @@
           <a:lstStyle/>
           <a:p>
             <a:pPr algn="ctr"/>
-            <a:endParaRPr/>
           </a:p>
         </p:txBody>
       </p:sp>
@@ -14317,7 +13656,7 @@
           </a:fontRef>
         </p:style>
         <p:txBody>
-          <a:bodyPr wrap="none" rtlCol="0" anchor="ctr"/>
+          <a:bodyPr rtlCol="0" anchor="ctr" wrap="none"/>
           <a:lstStyle/>
           <a:p>
             <a:pPr algn="ctr"/>
@@ -14434,7 +13773,6 @@
           <a:lstStyle/>
           <a:p>
             <a:pPr algn="ctr"/>
-            <a:endParaRPr/>
           </a:p>
         </p:txBody>
       </p:sp>
@@ -14540,7 +13878,6 @@
           <a:lstStyle/>
           <a:p>
             <a:pPr algn="ctr"/>
-            <a:endParaRPr/>
           </a:p>
         </p:txBody>
       </p:sp>
@@ -14646,7 +13983,6 @@
           <a:lstStyle/>
           <a:p>
             <a:pPr algn="ctr"/>
-            <a:endParaRPr/>
           </a:p>
         </p:txBody>
       </p:sp>
@@ -14752,7 +14088,6 @@
           <a:lstStyle/>
           <a:p>
             <a:pPr algn="ctr"/>
-            <a:endParaRPr/>
           </a:p>
         </p:txBody>
       </p:sp>
@@ -14797,7 +14132,6 @@
           <a:lstStyle/>
           <a:p>
             <a:pPr algn="ctr"/>
-            <a:endParaRPr/>
           </a:p>
         </p:txBody>
       </p:sp>
@@ -14990,7 +14324,7 @@
                 </a:solidFill>
                 <a:latin typeface="Calibri"/>
               </a:rPr>
-              <a:t>•  Déjà livré en avance : annulation d'un RDV (22) — à refléter dans Jira</a:t>
+              <a:t>•  Livré en avance sur le Sprint 3 : annulation d'un RDV avec motif (22)</a:t>
             </a:r>
           </a:p>
         </p:txBody>
@@ -15036,7 +14370,6 @@
           <a:lstStyle/>
           <a:p>
             <a:pPr algn="ctr"/>
-            <a:endParaRPr/>
           </a:p>
         </p:txBody>
       </p:sp>
@@ -15081,7 +14414,6 @@
           <a:lstStyle/>
           <a:p>
             <a:pPr algn="ctr"/>
-            <a:endParaRPr/>
           </a:p>
         </p:txBody>
       </p:sp>
@@ -15695,7 +15027,7 @@
 </file>
 
 <file path=ppt/theme/theme2.xml><?xml version="1.0" encoding="utf-8"?>
-<a:theme xmlns:a="http://schemas.openxmlformats.org/drawingml/2006/main" name="Thème Office">
+<a:theme xmlns:a="http://schemas.openxmlformats.org/drawingml/2006/main" name="Office Theme">
   <a:themeElements>
     <a:clrScheme name="Office">
       <a:dk1>
@@ -15705,44 +15037,44 @@
         <a:sysClr val="window" lastClr="FFFFFF"/>
       </a:lt1>
       <a:dk2>
-        <a:srgbClr val="0E2841"/>
+        <a:srgbClr val="1F497D"/>
       </a:dk2>
       <a:lt2>
-        <a:srgbClr val="E8E8E8"/>
+        <a:srgbClr val="EEECE1"/>
       </a:lt2>
       <a:accent1>
-        <a:srgbClr val="156082"/>
+        <a:srgbClr val="4F81BD"/>
       </a:accent1>
       <a:accent2>
-        <a:srgbClr val="E97132"/>
+        <a:srgbClr val="C0504D"/>
       </a:accent2>
       <a:accent3>
-        <a:srgbClr val="196B24"/>
+        <a:srgbClr val="9BBB59"/>
       </a:accent3>
       <a:accent4>
-        <a:srgbClr val="0F9ED5"/>
+        <a:srgbClr val="8064A2"/>
       </a:accent4>
       <a:accent5>
-        <a:srgbClr val="A02B93"/>
+        <a:srgbClr val="4BACC6"/>
       </a:accent5>
       <a:accent6>
-        <a:srgbClr val="4EA72E"/>
+        <a:srgbClr val="F79646"/>
       </a:accent6>
       <a:hlink>
-        <a:srgbClr val="467886"/>
+        <a:srgbClr val="0000FF"/>
       </a:hlink>
       <a:folHlink>
-        <a:srgbClr val="96607D"/>
+        <a:srgbClr val="800080"/>
       </a:folHlink>
     </a:clrScheme>
     <a:fontScheme name="Office">
       <a:majorFont>
-        <a:latin typeface="Aptos Display" panose="02110004020202020204"/>
+        <a:latin typeface="Calibri"/>
         <a:ea typeface=""/>
         <a:cs typeface=""/>
-        <a:font script="Jpan" typeface="游ゴシック Light"/>
+        <a:font script="Jpan" typeface="ＭＳ Ｐゴシック"/>
         <a:font script="Hang" typeface="맑은 고딕"/>
-        <a:font script="Hans" typeface="等线 Light"/>
+        <a:font script="Hans" typeface="宋体"/>
         <a:font script="Hant" typeface="新細明體"/>
         <a:font script="Arab" typeface="Times New Roman"/>
         <a:font script="Hebr" typeface="Times New Roman"/>
@@ -15770,31 +15102,14 @@
         <a:font script="Viet" typeface="Times New Roman"/>
         <a:font script="Uigh" typeface="Microsoft Uighur"/>
         <a:font script="Geor" typeface="Sylfaen"/>
-        <a:font script="Armn" typeface="Arial"/>
-        <a:font script="Bugi" typeface="Leelawadee UI"/>
-        <a:font script="Bopo" typeface="Microsoft JhengHei"/>
-        <a:font script="Java" typeface="Javanese Text"/>
-        <a:font script="Lisu" typeface="Segoe UI"/>
-        <a:font script="Mymr" typeface="Myanmar Text"/>
-        <a:font script="Nkoo" typeface="Ebrima"/>
-        <a:font script="Olck" typeface="Nirmala UI"/>
-        <a:font script="Osma" typeface="Ebrima"/>
-        <a:font script="Phag" typeface="Phagspa"/>
-        <a:font script="Syrn" typeface="Estrangelo Edessa"/>
-        <a:font script="Syrj" typeface="Estrangelo Edessa"/>
-        <a:font script="Syre" typeface="Estrangelo Edessa"/>
-        <a:font script="Sora" typeface="Nirmala UI"/>
-        <a:font script="Tale" typeface="Microsoft Tai Le"/>
-        <a:font script="Talu" typeface="Microsoft New Tai Lue"/>
-        <a:font script="Tfng" typeface="Ebrima"/>
       </a:majorFont>
       <a:minorFont>
-        <a:latin typeface="Aptos" panose="02110004020202020204"/>
+        <a:latin typeface="Calibri"/>
         <a:ea typeface=""/>
         <a:cs typeface=""/>
-        <a:font script="Jpan" typeface="游ゴシック"/>
+        <a:font script="Jpan" typeface="ＭＳ Ｐゴシック"/>
         <a:font script="Hang" typeface="맑은 고딕"/>
-        <a:font script="Hans" typeface="等线"/>
+        <a:font script="Hans" typeface="宋体"/>
         <a:font script="Hant" typeface="新細明體"/>
         <a:font script="Arab" typeface="Arial"/>
         <a:font script="Hebr" typeface="Arial"/>
@@ -15822,23 +15137,6 @@
         <a:font script="Viet" typeface="Arial"/>
         <a:font script="Uigh" typeface="Microsoft Uighur"/>
         <a:font script="Geor" typeface="Sylfaen"/>
-        <a:font script="Armn" typeface="Arial"/>
-        <a:font script="Bugi" typeface="Leelawadee UI"/>
-        <a:font script="Bopo" typeface="Microsoft JhengHei"/>
-        <a:font script="Java" typeface="Javanese Text"/>
-        <a:font script="Lisu" typeface="Segoe UI"/>
-        <a:font script="Mymr" typeface="Myanmar Text"/>
-        <a:font script="Nkoo" typeface="Ebrima"/>
-        <a:font script="Olck" typeface="Nirmala UI"/>
-        <a:font script="Osma" typeface="Ebrima"/>
-        <a:font script="Phag" typeface="Phagspa"/>
-        <a:font script="Syrn" typeface="Estrangelo Edessa"/>
-        <a:font script="Syrj" typeface="Estrangelo Edessa"/>
-        <a:font script="Syre" typeface="Estrangelo Edessa"/>
-        <a:font script="Sora" typeface="Nirmala UI"/>
-        <a:font script="Tale" typeface="Microsoft Tai Le"/>
-        <a:font script="Talu" typeface="Microsoft New Tai Lue"/>
-        <a:font script="Tfng" typeface="Ebrima"/>
       </a:minorFont>
     </a:fontScheme>
     <a:fmtScheme name="Office">
@@ -15850,136 +15148,180 @@
           <a:gsLst>
             <a:gs pos="0">
               <a:schemeClr val="phClr">
-                <a:lumMod val="110000"/>
-                <a:satMod val="105000"/>
-                <a:tint val="67000"/>
+                <a:tint val="50000"/>
+                <a:satMod val="300000"/>
               </a:schemeClr>
             </a:gs>
-            <a:gs pos="50000">
+            <a:gs pos="35000">
               <a:schemeClr val="phClr">
-                <a:lumMod val="105000"/>
-                <a:satMod val="103000"/>
-                <a:tint val="73000"/>
+                <a:tint val="37000"/>
+                <a:satMod val="300000"/>
               </a:schemeClr>
             </a:gs>
             <a:gs pos="100000">
               <a:schemeClr val="phClr">
-                <a:lumMod val="105000"/>
-                <a:satMod val="109000"/>
-                <a:tint val="81000"/>
+                <a:tint val="15000"/>
+                <a:satMod val="350000"/>
               </a:schemeClr>
             </a:gs>
           </a:gsLst>
-          <a:lin ang="5400000" scaled="0"/>
+          <a:lin ang="16200000" scaled="1"/>
         </a:gradFill>
         <a:gradFill rotWithShape="1">
           <a:gsLst>
             <a:gs pos="0">
               <a:schemeClr val="phClr">
-                <a:satMod val="103000"/>
-                <a:lumMod val="102000"/>
-                <a:tint val="94000"/>
-              </a:schemeClr>
-            </a:gs>
-            <a:gs pos="50000">
-              <a:schemeClr val="phClr">
-                <a:satMod val="110000"/>
-                <a:lumMod val="100000"/>
+                <a:tint val="100000"/>
                 <a:shade val="100000"/>
+                <a:satMod val="130000"/>
               </a:schemeClr>
             </a:gs>
             <a:gs pos="100000">
               <a:schemeClr val="phClr">
-                <a:lumMod val="99000"/>
-                <a:satMod val="120000"/>
-                <a:shade val="78000"/>
+                <a:tint val="50000"/>
+                <a:shade val="100000"/>
+                <a:satMod val="350000"/>
               </a:schemeClr>
             </a:gs>
           </a:gsLst>
-          <a:lin ang="5400000" scaled="0"/>
+          <a:lin ang="16200000" scaled="0"/>
         </a:gradFill>
       </a:fillStyleLst>
       <a:lnStyleLst>
-        <a:ln w="12700" cap="flat" cmpd="sng" algn="ctr">
+        <a:ln w="9525" cap="flat" cmpd="sng" algn="ctr">
           <a:solidFill>
-            <a:schemeClr val="phClr"/>
+            <a:schemeClr val="phClr">
+              <a:shade val="95000"/>
+              <a:satMod val="105000"/>
+            </a:schemeClr>
           </a:solidFill>
           <a:prstDash val="solid"/>
-          <a:miter lim="800000"/>
-        </a:ln>
-        <a:ln w="19050" cap="flat" cmpd="sng" algn="ctr">
-          <a:solidFill>
-            <a:schemeClr val="phClr"/>
-          </a:solidFill>
-          <a:prstDash val="solid"/>
-          <a:miter lim="800000"/>
         </a:ln>
         <a:ln w="25400" cap="flat" cmpd="sng" algn="ctr">
           <a:solidFill>
             <a:schemeClr val="phClr"/>
           </a:solidFill>
           <a:prstDash val="solid"/>
-          <a:miter lim="800000"/>
+        </a:ln>
+        <a:ln w="38100" cap="flat" cmpd="sng" algn="ctr">
+          <a:solidFill>
+            <a:schemeClr val="phClr"/>
+          </a:solidFill>
+          <a:prstDash val="solid"/>
         </a:ln>
       </a:lnStyleLst>
       <a:effectStyleLst>
         <a:effectStyle>
-          <a:effectLst/>
-        </a:effectStyle>
-        <a:effectStyle>
-          <a:effectLst/>
+          <a:effectLst>
+            <a:outerShdw blurRad="40000" dist="20000" dir="5400000" rotWithShape="0">
+              <a:srgbClr val="000000">
+                <a:alpha val="38000"/>
+              </a:srgbClr>
+            </a:outerShdw>
+          </a:effectLst>
         </a:effectStyle>
         <a:effectStyle>
           <a:effectLst>
-            <a:outerShdw blurRad="57150" dist="19050" dir="5400000" algn="ctr" rotWithShape="0">
+            <a:outerShdw blurRad="40000" dist="23000" dir="5400000" rotWithShape="0">
               <a:srgbClr val="000000">
-                <a:alpha val="63000"/>
+                <a:alpha val="35000"/>
               </a:srgbClr>
             </a:outerShdw>
           </a:effectLst>
+        </a:effectStyle>
+        <a:effectStyle>
+          <a:effectLst>
+            <a:outerShdw blurRad="40000" dist="23000" dir="5400000" rotWithShape="0">
+              <a:srgbClr val="000000">
+                <a:alpha val="35000"/>
+              </a:srgbClr>
+            </a:outerShdw>
+          </a:effectLst>
+          <a:scene3d>
+            <a:camera prst="orthographicFront">
+              <a:rot lat="0" lon="0" rev="0"/>
+            </a:camera>
+            <a:lightRig rig="threePt" dir="t">
+              <a:rot lat="0" lon="0" rev="1200000"/>
+            </a:lightRig>
+          </a:scene3d>
+          <a:sp3d>
+            <a:bevelT w="63500" h="25400"/>
+          </a:sp3d>
         </a:effectStyle>
       </a:effectStyleLst>
       <a:bgFillStyleLst>
         <a:solidFill>
           <a:schemeClr val="phClr"/>
         </a:solidFill>
-        <a:solidFill>
-          <a:schemeClr val="phClr">
-            <a:tint val="95000"/>
-            <a:satMod val="170000"/>
-          </a:schemeClr>
-        </a:solidFill>
         <a:gradFill rotWithShape="1">
           <a:gsLst>
             <a:gs pos="0">
               <a:schemeClr val="phClr">
-                <a:tint val="93000"/>
-                <a:satMod val="150000"/>
-                <a:shade val="98000"/>
-                <a:lumMod val="102000"/>
+                <a:tint val="40000"/>
+                <a:satMod val="350000"/>
               </a:schemeClr>
             </a:gs>
-            <a:gs pos="50000">
+            <a:gs pos="40000">
               <a:schemeClr val="phClr">
-                <a:tint val="98000"/>
-                <a:satMod val="130000"/>
-                <a:shade val="90000"/>
-                <a:lumMod val="103000"/>
+                <a:tint val="45000"/>
+                <a:shade val="99000"/>
+                <a:satMod val="350000"/>
               </a:schemeClr>
             </a:gs>
             <a:gs pos="100000">
               <a:schemeClr val="phClr">
-                <a:shade val="63000"/>
-                <a:satMod val="120000"/>
+                <a:shade val="20000"/>
+                <a:satMod val="255000"/>
               </a:schemeClr>
             </a:gs>
           </a:gsLst>
-          <a:lin ang="5400000" scaled="0"/>
+          <a:path path="circle">
+            <a:fillToRect l="50000" t="-80000" r="50000" b="180000"/>
+          </a:path>
+        </a:gradFill>
+        <a:gradFill rotWithShape="1">
+          <a:gsLst>
+            <a:gs pos="0">
+              <a:schemeClr val="phClr">
+                <a:tint val="80000"/>
+                <a:satMod val="300000"/>
+              </a:schemeClr>
+            </a:gs>
+            <a:gs pos="100000">
+              <a:schemeClr val="phClr">
+                <a:shade val="30000"/>
+                <a:satMod val="200000"/>
+              </a:schemeClr>
+            </a:gs>
+          </a:gsLst>
+          <a:path path="circle">
+            <a:fillToRect l="50000" t="50000" r="50000" b="50000"/>
+          </a:path>
         </a:gradFill>
       </a:bgFillStyleLst>
     </a:fmtScheme>
   </a:themeElements>
   <a:objectDefaults>
+    <a:spDef>
+      <a:spPr/>
+      <a:bodyPr/>
+      <a:lstStyle/>
+      <a:style>
+        <a:lnRef idx="1">
+          <a:schemeClr val="accent1"/>
+        </a:lnRef>
+        <a:fillRef idx="3">
+          <a:schemeClr val="accent1"/>
+        </a:fillRef>
+        <a:effectRef idx="2">
+          <a:schemeClr val="accent1"/>
+        </a:effectRef>
+        <a:fontRef idx="minor">
+          <a:schemeClr val="lt1"/>
+        </a:fontRef>
+      </a:style>
+    </a:spDef>
     <a:lnDef>
       <a:spPr/>
       <a:bodyPr/>
@@ -16001,16 +15343,5 @@
     </a:lnDef>
   </a:objectDefaults>
   <a:extraClrSchemeLst/>
-  <a:extLst>
-    <a:ext uri="{05A4C25C-085E-4340-85A3-A5531E510DB2}">
-      <thm15:themeFamily xmlns:thm15="http://schemas.microsoft.com/office/thememl/2012/main" name="Office Theme" id="{2E142A2C-CD16-42D6-873A-C26D2A0506FA}" vid="{1BDDFF52-6CD6-40A5-AB3C-68EB2F1E4D0A}"/>
-    </a:ext>
-  </a:extLst>
 </a:theme>
-</file>
-
-<file path=docMetadata/LabelInfo.xml><?xml version="1.0" encoding="utf-8"?>
-<clbl:labelList xmlns:clbl="http://schemas.microsoft.com/office/2020/mipLabelMetadata">
-  <clbl:label id="{3513b79f-ce8d-43d6-b7e5-c12d3e236916}" enabled="1" method="Standard" siteId="{ad8a84ef-f1f3-4b14-ad08-b99ca66f7e30}" contentBits="0" removed="0"/>
-</clbl:labelList>
 </file>